--- a/Tracey-Scott-Portfolio-New.pptx
+++ b/Tracey-Scott-Portfolio-New.pptx
@@ -11287,6 +11287,249 @@
   <p:clrMapOvr>
     <a:masterClrMapping/>
   </p:clrMapOvr>
+  <p:transition spd="med" advClick="1">
+    <p:fade/>
+  </p:transition>
+  <p:timing>
+    <p:tnLst>
+      <p:par>
+        <p:cTn id="1" dur="indefinite" restart="never" nodeType="tmRoot">
+          <p:childTnLst>
+            <p:seq concurrent="1" nextAc="seek">
+              <p:cTn id="2" dur="indefinite" nodeType="mainSeq">
+                <p:childTnLst>
+                  <p:par>
+                    <p:cTn id="3" presetID="10" presetClass="entr" presetSubtype="0" fill="hold" nodeType="afterPrev">
+                      <p:stCondLst>
+                        <p:cond delay="0"/>
+                      </p:stCondLst>
+                      <p:childTnLst>
+                        <p:set>
+                          <p:cBhvr>
+                            <p:cTn id="4" dur="1" fill="hold">
+                              <p:stCondLst>
+                                <p:cond delay="0"/>
+                              </p:stCondLst>
+                            </p:cTn>
+                            <p:tgtEl>
+                              <p:spTgt spid="72"/>
+                            </p:tgtEl>
+                            <p:attrNameLst>
+                              <p:attrName>style.visibility</p:attrName>
+                            </p:attrNameLst>
+                          </p:cBhvr>
+                          <p:to>
+                            <p:strVal val="visible"/>
+                          </p:to>
+                        </p:set>
+                        <p:animEffect transition="in" filter="fade">
+                          <p:cBhvr>
+                            <p:cTn id="100" dur="500"/>
+                            <p:tgtEl>
+                              <p:spTgt spid="72"/>
+                            </p:tgtEl>
+                          </p:cBhvr>
+                        </p:animEffect>
+                      </p:childTnLst>
+                    </p:cTn>
+                  </p:par>
+                  <p:par>
+                    <p:cTn id="5" presetID="10" presetClass="entr" presetSubtype="0" fill="hold" nodeType="afterPrev">
+                      <p:stCondLst>
+                        <p:cond delay="300"/>
+                      </p:stCondLst>
+                      <p:childTnLst>
+                        <p:set>
+                          <p:cBhvr>
+                            <p:cTn id="6" dur="1" fill="hold">
+                              <p:stCondLst>
+                                <p:cond delay="0"/>
+                              </p:stCondLst>
+                            </p:cTn>
+                            <p:tgtEl>
+                              <p:spTgt spid="61"/>
+                            </p:tgtEl>
+                            <p:attrNameLst>
+                              <p:attrName>style.visibility</p:attrName>
+                            </p:attrNameLst>
+                          </p:cBhvr>
+                          <p:to>
+                            <p:strVal val="visible"/>
+                          </p:to>
+                        </p:set>
+                        <p:animEffect transition="in" filter="fade">
+                          <p:cBhvr>
+                            <p:cTn id="101" dur="500"/>
+                            <p:tgtEl>
+                              <p:spTgt spid="61"/>
+                            </p:tgtEl>
+                          </p:cBhvr>
+                        </p:animEffect>
+                      </p:childTnLst>
+                    </p:cTn>
+                  </p:par>
+                  <p:par>
+                    <p:cTn id="7" presetID="10" presetClass="entr" presetSubtype="0" fill="hold" nodeType="afterPrev">
+                      <p:stCondLst>
+                        <p:cond delay="600"/>
+                      </p:stCondLst>
+                      <p:childTnLst>
+                        <p:set>
+                          <p:cBhvr>
+                            <p:cTn id="8" dur="1" fill="hold">
+                              <p:stCondLst>
+                                <p:cond delay="0"/>
+                              </p:stCondLst>
+                            </p:cTn>
+                            <p:tgtEl>
+                              <p:spTgt spid="62"/>
+                            </p:tgtEl>
+                            <p:attrNameLst>
+                              <p:attrName>style.visibility</p:attrName>
+                            </p:attrNameLst>
+                          </p:cBhvr>
+                          <p:to>
+                            <p:strVal val="visible"/>
+                          </p:to>
+                        </p:set>
+                        <p:animEffect transition="in" filter="fade">
+                          <p:cBhvr>
+                            <p:cTn id="102" dur="500"/>
+                            <p:tgtEl>
+                              <p:spTgt spid="62"/>
+                            </p:tgtEl>
+                          </p:cBhvr>
+                        </p:animEffect>
+                      </p:childTnLst>
+                    </p:cTn>
+                  </p:par>
+                  <p:par>
+                    <p:cTn id="9" presetID="10" presetClass="entr" presetSubtype="0" fill="hold" nodeType="afterPrev">
+                      <p:stCondLst>
+                        <p:cond delay="900"/>
+                      </p:stCondLst>
+                      <p:childTnLst>
+                        <p:set>
+                          <p:cBhvr>
+                            <p:cTn id="10" dur="1" fill="hold">
+                              <p:stCondLst>
+                                <p:cond delay="0"/>
+                              </p:stCondLst>
+                            </p:cTn>
+                            <p:tgtEl>
+                              <p:spTgt spid="63"/>
+                            </p:tgtEl>
+                            <p:attrNameLst>
+                              <p:attrName>style.visibility</p:attrName>
+                            </p:attrNameLst>
+                          </p:cBhvr>
+                          <p:to>
+                            <p:strVal val="visible"/>
+                          </p:to>
+                        </p:set>
+                        <p:animEffect transition="in" filter="fade">
+                          <p:cBhvr>
+                            <p:cTn id="103" dur="500"/>
+                            <p:tgtEl>
+                              <p:spTgt spid="63"/>
+                            </p:tgtEl>
+                          </p:cBhvr>
+                        </p:animEffect>
+                      </p:childTnLst>
+                    </p:cTn>
+                  </p:par>
+                  <p:par>
+                    <p:cTn id="11" presetID="10" presetClass="entr" presetSubtype="0" fill="hold" nodeType="afterPrev">
+                      <p:stCondLst>
+                        <p:cond delay="1200"/>
+                      </p:stCondLst>
+                      <p:childTnLst>
+                        <p:set>
+                          <p:cBhvr>
+                            <p:cTn id="12" dur="1" fill="hold">
+                              <p:stCondLst>
+                                <p:cond delay="0"/>
+                              </p:stCondLst>
+                            </p:cTn>
+                            <p:tgtEl>
+                              <p:spTgt spid="64"/>
+                            </p:tgtEl>
+                            <p:attrNameLst>
+                              <p:attrName>style.visibility</p:attrName>
+                            </p:attrNameLst>
+                          </p:cBhvr>
+                          <p:to>
+                            <p:strVal val="visible"/>
+                          </p:to>
+                        </p:set>
+                        <p:animEffect transition="in" filter="fade">
+                          <p:cBhvr>
+                            <p:cTn id="104" dur="500"/>
+                            <p:tgtEl>
+                              <p:spTgt spid="64"/>
+                            </p:tgtEl>
+                          </p:cBhvr>
+                        </p:animEffect>
+                      </p:childTnLst>
+                    </p:cTn>
+                  </p:par>
+                  <p:par>
+                    <p:cTn id="13" presetID="10" presetClass="entr" presetSubtype="0" fill="hold" nodeType="afterPrev">
+                      <p:stCondLst>
+                        <p:cond delay="1500"/>
+                      </p:stCondLst>
+                      <p:childTnLst>
+                        <p:set>
+                          <p:cBhvr>
+                            <p:cTn id="14" dur="1" fill="hold">
+                              <p:stCondLst>
+                                <p:cond delay="0"/>
+                              </p:stCondLst>
+                            </p:cTn>
+                            <p:tgtEl>
+                              <p:spTgt spid="65"/>
+                            </p:tgtEl>
+                            <p:attrNameLst>
+                              <p:attrName>style.visibility</p:attrName>
+                            </p:attrNameLst>
+                          </p:cBhvr>
+                          <p:to>
+                            <p:strVal val="visible"/>
+                          </p:to>
+                        </p:set>
+                        <p:animEffect transition="in" filter="fade">
+                          <p:cBhvr>
+                            <p:cTn id="105" dur="500"/>
+                            <p:tgtEl>
+                              <p:spTgt spid="65"/>
+                            </p:tgtEl>
+                          </p:cBhvr>
+                        </p:animEffect>
+                      </p:childTnLst>
+                    </p:cTn>
+                  </p:par>
+                </p:childTnLst>
+              </p:cTn>
+              <p:prevCondLst>
+                <p:cond evt="onPrev" delay="0">
+                  <p:tgtEl>
+                    <p:sldTgt/>
+                  </p:tgtEl>
+                </p:cond>
+              </p:prevCondLst>
+              <p:nextCondLst>
+                <p:cond evt="onNext" delay="0">
+                  <p:tgtEl>
+                    <p:sldTgt/>
+                  </p:tgtEl>
+                </p:cond>
+              </p:nextCondLst>
+            </p:seq>
+          </p:childTnLst>
+        </p:cTn>
+      </p:par>
+    </p:tnLst>
+  </p:timing>
 </p:sld>
 </file>
 
@@ -11465,6 +11708,179 @@
   <p:clrMapOvr>
     <a:masterClrMapping/>
   </p:clrMapOvr>
+  <p:transition spd="med" advClick="1">
+    <p:fade/>
+  </p:transition>
+  <p:timing>
+    <p:tnLst>
+      <p:par>
+        <p:cTn id="1" dur="indefinite" restart="never" nodeType="tmRoot">
+          <p:childTnLst>
+            <p:seq concurrent="1" nextAc="seek">
+              <p:cTn id="2" dur="indefinite" nodeType="mainSeq">
+                <p:childTnLst>
+                  <p:par>
+                    <p:cTn id="3" presetID="10" presetClass="entr" presetSubtype="0" fill="hold" nodeType="afterPrev">
+                      <p:stCondLst>
+                        <p:cond delay="0"/>
+                      </p:stCondLst>
+                      <p:childTnLst>
+                        <p:set>
+                          <p:cBhvr>
+                            <p:cTn id="4" dur="1" fill="hold">
+                              <p:stCondLst>
+                                <p:cond delay="0"/>
+                              </p:stCondLst>
+                            </p:cTn>
+                            <p:tgtEl>
+                              <p:spTgt spid="273"/>
+                            </p:tgtEl>
+                            <p:attrNameLst>
+                              <p:attrName>style.visibility</p:attrName>
+                            </p:attrNameLst>
+                          </p:cBhvr>
+                          <p:to>
+                            <p:strVal val="visible"/>
+                          </p:to>
+                        </p:set>
+                        <p:animEffect transition="in" filter="fade">
+                          <p:cBhvr>
+                            <p:cTn id="100" dur="500"/>
+                            <p:tgtEl>
+                              <p:spTgt spid="273"/>
+                            </p:tgtEl>
+                          </p:cBhvr>
+                        </p:animEffect>
+                      </p:childTnLst>
+                    </p:cTn>
+                  </p:par>
+                  <p:par>
+                    <p:cTn id="5" presetID="10" presetClass="entr" presetSubtype="0" fill="hold" nodeType="afterPrev">
+                      <p:stCondLst>
+                        <p:cond delay="300"/>
+                      </p:stCondLst>
+                      <p:childTnLst>
+                        <p:set>
+                          <p:cBhvr>
+                            <p:cTn id="6" dur="1" fill="hold">
+                              <p:stCondLst>
+                                <p:cond delay="0"/>
+                              </p:stCondLst>
+                            </p:cTn>
+                            <p:tgtEl>
+                              <p:spTgt spid="274"/>
+                            </p:tgtEl>
+                            <p:attrNameLst>
+                              <p:attrName>style.visibility</p:attrName>
+                            </p:attrNameLst>
+                          </p:cBhvr>
+                          <p:to>
+                            <p:strVal val="visible"/>
+                          </p:to>
+                        </p:set>
+                        <p:animEffect transition="in" filter="fade">
+                          <p:cBhvr>
+                            <p:cTn id="101" dur="500"/>
+                            <p:tgtEl>
+                              <p:spTgt spid="274"/>
+                            </p:tgtEl>
+                          </p:cBhvr>
+                        </p:animEffect>
+                      </p:childTnLst>
+                    </p:cTn>
+                  </p:par>
+                  <p:par>
+                    <p:cTn id="7" presetID="10" presetClass="entr" presetSubtype="0" fill="hold" nodeType="afterPrev">
+                      <p:stCondLst>
+                        <p:cond delay="600"/>
+                      </p:stCondLst>
+                      <p:childTnLst>
+                        <p:set>
+                          <p:cBhvr>
+                            <p:cTn id="8" dur="1" fill="hold">
+                              <p:stCondLst>
+                                <p:cond delay="0"/>
+                              </p:stCondLst>
+                            </p:cTn>
+                            <p:tgtEl>
+                              <p:spTgt spid="275"/>
+                            </p:tgtEl>
+                            <p:attrNameLst>
+                              <p:attrName>style.visibility</p:attrName>
+                            </p:attrNameLst>
+                          </p:cBhvr>
+                          <p:to>
+                            <p:strVal val="visible"/>
+                          </p:to>
+                        </p:set>
+                        <p:animEffect transition="in" filter="fade">
+                          <p:cBhvr>
+                            <p:cTn id="102" dur="500"/>
+                            <p:tgtEl>
+                              <p:spTgt spid="275"/>
+                            </p:tgtEl>
+                          </p:cBhvr>
+                        </p:animEffect>
+                      </p:childTnLst>
+                    </p:cTn>
+                  </p:par>
+                  <p:par>
+                    <p:cTn id="9" presetID="10" presetClass="entr" presetSubtype="0" fill="hold" nodeType="afterPrev">
+                      <p:stCondLst>
+                        <p:cond delay="900"/>
+                      </p:stCondLst>
+                      <p:childTnLst>
+                        <p:set>
+                          <p:cBhvr>
+                            <p:cTn id="10" dur="1" fill="hold">
+                              <p:stCondLst>
+                                <p:cond delay="0"/>
+                              </p:stCondLst>
+                            </p:cTn>
+                            <p:tgtEl>
+                              <p:spTgt spid="276"/>
+                            </p:tgtEl>
+                            <p:attrNameLst>
+                              <p:attrName>style.visibility</p:attrName>
+                            </p:attrNameLst>
+                          </p:cBhvr>
+                          <p:to>
+                            <p:strVal val="visible"/>
+                          </p:to>
+                        </p:set>
+                        <p:animEffect transition="in" filter="fade">
+                          <p:cBhvr>
+                            <p:cTn id="103" dur="500"/>
+                            <p:tgtEl>
+                              <p:spTgt spid="276"/>
+                            </p:tgtEl>
+                          </p:cBhvr>
+                        </p:animEffect>
+                      </p:childTnLst>
+                    </p:cTn>
+                  </p:par>
+                </p:childTnLst>
+              </p:cTn>
+              <p:prevCondLst>
+                <p:cond evt="onPrev" delay="0">
+                  <p:tgtEl>
+                    <p:sldTgt/>
+                  </p:tgtEl>
+                </p:cond>
+              </p:prevCondLst>
+              <p:nextCondLst>
+                <p:cond evt="onNext" delay="0">
+                  <p:tgtEl>
+                    <p:sldTgt/>
+                  </p:tgtEl>
+                </p:cond>
+              </p:nextCondLst>
+            </p:seq>
+          </p:childTnLst>
+        </p:cTn>
+      </p:par>
+    </p:tnLst>
+  </p:timing>
 </p:sld>
 </file>
 
@@ -11611,6 +12027,109 @@
   <p:clrMapOvr>
     <a:masterClrMapping/>
   </p:clrMapOvr>
+  <p:transition spd="med" advClick="1">
+    <p:fade/>
+  </p:transition>
+  <p:timing>
+    <p:tnLst>
+      <p:par>
+        <p:cTn id="1" dur="indefinite" restart="never" nodeType="tmRoot">
+          <p:childTnLst>
+            <p:seq concurrent="1" nextAc="seek">
+              <p:cTn id="2" dur="indefinite" nodeType="mainSeq">
+                <p:childTnLst>
+                  <p:par>
+                    <p:cTn id="3" presetID="10" presetClass="entr" presetSubtype="0" fill="hold" nodeType="afterPrev">
+                      <p:stCondLst>
+                        <p:cond delay="0"/>
+                      </p:stCondLst>
+                      <p:childTnLst>
+                        <p:set>
+                          <p:cBhvr>
+                            <p:cTn id="4" dur="1" fill="hold">
+                              <p:stCondLst>
+                                <p:cond delay="0"/>
+                              </p:stCondLst>
+                            </p:cTn>
+                            <p:tgtEl>
+                              <p:spTgt spid="281"/>
+                            </p:tgtEl>
+                            <p:attrNameLst>
+                              <p:attrName>style.visibility</p:attrName>
+                            </p:attrNameLst>
+                          </p:cBhvr>
+                          <p:to>
+                            <p:strVal val="visible"/>
+                          </p:to>
+                        </p:set>
+                        <p:animEffect transition="in" filter="fade">
+                          <p:cBhvr>
+                            <p:cTn id="100" dur="500"/>
+                            <p:tgtEl>
+                              <p:spTgt spid="281"/>
+                            </p:tgtEl>
+                          </p:cBhvr>
+                        </p:animEffect>
+                      </p:childTnLst>
+                    </p:cTn>
+                  </p:par>
+                  <p:par>
+                    <p:cTn id="5" presetID="10" presetClass="entr" presetSubtype="0" fill="hold" nodeType="afterPrev">
+                      <p:stCondLst>
+                        <p:cond delay="300"/>
+                      </p:stCondLst>
+                      <p:childTnLst>
+                        <p:set>
+                          <p:cBhvr>
+                            <p:cTn id="6" dur="1" fill="hold">
+                              <p:stCondLst>
+                                <p:cond delay="0"/>
+                              </p:stCondLst>
+                            </p:cTn>
+                            <p:tgtEl>
+                              <p:spTgt spid="282"/>
+                            </p:tgtEl>
+                            <p:attrNameLst>
+                              <p:attrName>style.visibility</p:attrName>
+                            </p:attrNameLst>
+                          </p:cBhvr>
+                          <p:to>
+                            <p:strVal val="visible"/>
+                          </p:to>
+                        </p:set>
+                        <p:animEffect transition="in" filter="fade">
+                          <p:cBhvr>
+                            <p:cTn id="101" dur="500"/>
+                            <p:tgtEl>
+                              <p:spTgt spid="282"/>
+                            </p:tgtEl>
+                          </p:cBhvr>
+                        </p:animEffect>
+                      </p:childTnLst>
+                    </p:cTn>
+                  </p:par>
+                </p:childTnLst>
+              </p:cTn>
+              <p:prevCondLst>
+                <p:cond evt="onPrev" delay="0">
+                  <p:tgtEl>
+                    <p:sldTgt/>
+                  </p:tgtEl>
+                </p:cond>
+              </p:prevCondLst>
+              <p:nextCondLst>
+                <p:cond evt="onNext" delay="0">
+                  <p:tgtEl>
+                    <p:sldTgt/>
+                  </p:tgtEl>
+                </p:cond>
+              </p:nextCondLst>
+            </p:seq>
+          </p:childTnLst>
+        </p:cTn>
+      </p:par>
+    </p:tnLst>
+  </p:timing>
 </p:sld>
 </file>
 
@@ -12520,6 +13039,249 @@
   <p:clrMapOvr>
     <a:masterClrMapping/>
   </p:clrMapOvr>
+  <p:transition spd="med" advClick="1">
+    <p:fade/>
+  </p:transition>
+  <p:timing>
+    <p:tnLst>
+      <p:par>
+        <p:cTn id="1" dur="indefinite" restart="never" nodeType="tmRoot">
+          <p:childTnLst>
+            <p:seq concurrent="1" nextAc="seek">
+              <p:cTn id="2" dur="indefinite" nodeType="mainSeq">
+                <p:childTnLst>
+                  <p:par>
+                    <p:cTn id="3" presetID="10" presetClass="entr" presetSubtype="0" fill="hold" nodeType="afterPrev">
+                      <p:stCondLst>
+                        <p:cond delay="0"/>
+                      </p:stCondLst>
+                      <p:childTnLst>
+                        <p:set>
+                          <p:cBhvr>
+                            <p:cTn id="4" dur="1" fill="hold">
+                              <p:stCondLst>
+                                <p:cond delay="0"/>
+                              </p:stCondLst>
+                            </p:cTn>
+                            <p:tgtEl>
+                              <p:spTgt spid="287"/>
+                            </p:tgtEl>
+                            <p:attrNameLst>
+                              <p:attrName>style.visibility</p:attrName>
+                            </p:attrNameLst>
+                          </p:cBhvr>
+                          <p:to>
+                            <p:strVal val="visible"/>
+                          </p:to>
+                        </p:set>
+                        <p:animEffect transition="in" filter="fade">
+                          <p:cBhvr>
+                            <p:cTn id="100" dur="500"/>
+                            <p:tgtEl>
+                              <p:spTgt spid="287"/>
+                            </p:tgtEl>
+                          </p:cBhvr>
+                        </p:animEffect>
+                      </p:childTnLst>
+                    </p:cTn>
+                  </p:par>
+                  <p:par>
+                    <p:cTn id="5" presetID="10" presetClass="entr" presetSubtype="0" fill="hold" nodeType="afterPrev">
+                      <p:stCondLst>
+                        <p:cond delay="300"/>
+                      </p:stCondLst>
+                      <p:childTnLst>
+                        <p:set>
+                          <p:cBhvr>
+                            <p:cTn id="6" dur="1" fill="hold">
+                              <p:stCondLst>
+                                <p:cond delay="0"/>
+                              </p:stCondLst>
+                            </p:cTn>
+                            <p:tgtEl>
+                              <p:spTgt spid="288"/>
+                            </p:tgtEl>
+                            <p:attrNameLst>
+                              <p:attrName>style.visibility</p:attrName>
+                            </p:attrNameLst>
+                          </p:cBhvr>
+                          <p:to>
+                            <p:strVal val="visible"/>
+                          </p:to>
+                        </p:set>
+                        <p:animEffect transition="in" filter="fade">
+                          <p:cBhvr>
+                            <p:cTn id="101" dur="500"/>
+                            <p:tgtEl>
+                              <p:spTgt spid="288"/>
+                            </p:tgtEl>
+                          </p:cBhvr>
+                        </p:animEffect>
+                      </p:childTnLst>
+                    </p:cTn>
+                  </p:par>
+                  <p:par>
+                    <p:cTn id="7" presetID="10" presetClass="entr" presetSubtype="0" fill="hold" nodeType="afterPrev">
+                      <p:stCondLst>
+                        <p:cond delay="600"/>
+                      </p:stCondLst>
+                      <p:childTnLst>
+                        <p:set>
+                          <p:cBhvr>
+                            <p:cTn id="8" dur="1" fill="hold">
+                              <p:stCondLst>
+                                <p:cond delay="0"/>
+                              </p:stCondLst>
+                            </p:cTn>
+                            <p:tgtEl>
+                              <p:spTgt spid="289"/>
+                            </p:tgtEl>
+                            <p:attrNameLst>
+                              <p:attrName>style.visibility</p:attrName>
+                            </p:attrNameLst>
+                          </p:cBhvr>
+                          <p:to>
+                            <p:strVal val="visible"/>
+                          </p:to>
+                        </p:set>
+                        <p:animEffect transition="in" filter="fade">
+                          <p:cBhvr>
+                            <p:cTn id="102" dur="500"/>
+                            <p:tgtEl>
+                              <p:spTgt spid="289"/>
+                            </p:tgtEl>
+                          </p:cBhvr>
+                        </p:animEffect>
+                      </p:childTnLst>
+                    </p:cTn>
+                  </p:par>
+                  <p:par>
+                    <p:cTn id="9" presetID="10" presetClass="entr" presetSubtype="0" fill="hold" nodeType="afterPrev">
+                      <p:stCondLst>
+                        <p:cond delay="900"/>
+                      </p:stCondLst>
+                      <p:childTnLst>
+                        <p:set>
+                          <p:cBhvr>
+                            <p:cTn id="10" dur="1" fill="hold">
+                              <p:stCondLst>
+                                <p:cond delay="0"/>
+                              </p:stCondLst>
+                            </p:cTn>
+                            <p:tgtEl>
+                              <p:spTgt spid="290"/>
+                            </p:tgtEl>
+                            <p:attrNameLst>
+                              <p:attrName>style.visibility</p:attrName>
+                            </p:attrNameLst>
+                          </p:cBhvr>
+                          <p:to>
+                            <p:strVal val="visible"/>
+                          </p:to>
+                        </p:set>
+                        <p:animEffect transition="in" filter="fade">
+                          <p:cBhvr>
+                            <p:cTn id="103" dur="500"/>
+                            <p:tgtEl>
+                              <p:spTgt spid="290"/>
+                            </p:tgtEl>
+                          </p:cBhvr>
+                        </p:animEffect>
+                      </p:childTnLst>
+                    </p:cTn>
+                  </p:par>
+                  <p:par>
+                    <p:cTn id="11" presetID="10" presetClass="entr" presetSubtype="0" fill="hold" nodeType="afterPrev">
+                      <p:stCondLst>
+                        <p:cond delay="1200"/>
+                      </p:stCondLst>
+                      <p:childTnLst>
+                        <p:set>
+                          <p:cBhvr>
+                            <p:cTn id="12" dur="1" fill="hold">
+                              <p:stCondLst>
+                                <p:cond delay="0"/>
+                              </p:stCondLst>
+                            </p:cTn>
+                            <p:tgtEl>
+                              <p:spTgt spid="291"/>
+                            </p:tgtEl>
+                            <p:attrNameLst>
+                              <p:attrName>style.visibility</p:attrName>
+                            </p:attrNameLst>
+                          </p:cBhvr>
+                          <p:to>
+                            <p:strVal val="visible"/>
+                          </p:to>
+                        </p:set>
+                        <p:animEffect transition="in" filter="fade">
+                          <p:cBhvr>
+                            <p:cTn id="104" dur="500"/>
+                            <p:tgtEl>
+                              <p:spTgt spid="291"/>
+                            </p:tgtEl>
+                          </p:cBhvr>
+                        </p:animEffect>
+                      </p:childTnLst>
+                    </p:cTn>
+                  </p:par>
+                  <p:par>
+                    <p:cTn id="13" presetID="10" presetClass="entr" presetSubtype="0" fill="hold" nodeType="afterPrev">
+                      <p:stCondLst>
+                        <p:cond delay="1500"/>
+                      </p:stCondLst>
+                      <p:childTnLst>
+                        <p:set>
+                          <p:cBhvr>
+                            <p:cTn id="14" dur="1" fill="hold">
+                              <p:stCondLst>
+                                <p:cond delay="0"/>
+                              </p:stCondLst>
+                            </p:cTn>
+                            <p:tgtEl>
+                              <p:spTgt spid="292"/>
+                            </p:tgtEl>
+                            <p:attrNameLst>
+                              <p:attrName>style.visibility</p:attrName>
+                            </p:attrNameLst>
+                          </p:cBhvr>
+                          <p:to>
+                            <p:strVal val="visible"/>
+                          </p:to>
+                        </p:set>
+                        <p:animEffect transition="in" filter="fade">
+                          <p:cBhvr>
+                            <p:cTn id="105" dur="500"/>
+                            <p:tgtEl>
+                              <p:spTgt spid="292"/>
+                            </p:tgtEl>
+                          </p:cBhvr>
+                        </p:animEffect>
+                      </p:childTnLst>
+                    </p:cTn>
+                  </p:par>
+                </p:childTnLst>
+              </p:cTn>
+              <p:prevCondLst>
+                <p:cond evt="onPrev" delay="0">
+                  <p:tgtEl>
+                    <p:sldTgt/>
+                  </p:tgtEl>
+                </p:cond>
+              </p:prevCondLst>
+              <p:nextCondLst>
+                <p:cond evt="onNext" delay="0">
+                  <p:tgtEl>
+                    <p:sldTgt/>
+                  </p:tgtEl>
+                </p:cond>
+              </p:nextCondLst>
+            </p:seq>
+          </p:childTnLst>
+        </p:cTn>
+      </p:par>
+    </p:tnLst>
+  </p:timing>
 </p:sld>
 </file>
 
@@ -13952,6 +14714,144 @@
   <p:clrMapOvr>
     <a:masterClrMapping/>
   </p:clrMapOvr>
+  <p:transition spd="med" advClick="1">
+    <p:fade/>
+  </p:transition>
+  <p:timing>
+    <p:tnLst>
+      <p:par>
+        <p:cTn id="1" dur="indefinite" restart="never" nodeType="tmRoot">
+          <p:childTnLst>
+            <p:seq concurrent="1" nextAc="seek">
+              <p:cTn id="2" dur="indefinite" nodeType="mainSeq">
+                <p:childTnLst>
+                  <p:par>
+                    <p:cTn id="3" presetID="10" presetClass="entr" presetSubtype="0" fill="hold" nodeType="afterPrev">
+                      <p:stCondLst>
+                        <p:cond delay="0"/>
+                      </p:stCondLst>
+                      <p:childTnLst>
+                        <p:set>
+                          <p:cBhvr>
+                            <p:cTn id="4" dur="1" fill="hold">
+                              <p:stCondLst>
+                                <p:cond delay="0"/>
+                              </p:stCondLst>
+                            </p:cTn>
+                            <p:tgtEl>
+                              <p:spTgt spid="308"/>
+                            </p:tgtEl>
+                            <p:attrNameLst>
+                              <p:attrName>style.visibility</p:attrName>
+                            </p:attrNameLst>
+                          </p:cBhvr>
+                          <p:to>
+                            <p:strVal val="visible"/>
+                          </p:to>
+                        </p:set>
+                        <p:animEffect transition="in" filter="fade">
+                          <p:cBhvr>
+                            <p:cTn id="100" dur="500"/>
+                            <p:tgtEl>
+                              <p:spTgt spid="308"/>
+                            </p:tgtEl>
+                          </p:cBhvr>
+                        </p:animEffect>
+                      </p:childTnLst>
+                    </p:cTn>
+                  </p:par>
+                  <p:par>
+                    <p:cTn id="5" presetID="10" presetClass="entr" presetSubtype="0" fill="hold" nodeType="afterPrev">
+                      <p:stCondLst>
+                        <p:cond delay="300"/>
+                      </p:stCondLst>
+                      <p:childTnLst>
+                        <p:set>
+                          <p:cBhvr>
+                            <p:cTn id="6" dur="1" fill="hold">
+                              <p:stCondLst>
+                                <p:cond delay="0"/>
+                              </p:stCondLst>
+                            </p:cTn>
+                            <p:tgtEl>
+                              <p:spTgt spid="309"/>
+                            </p:tgtEl>
+                            <p:attrNameLst>
+                              <p:attrName>style.visibility</p:attrName>
+                            </p:attrNameLst>
+                          </p:cBhvr>
+                          <p:to>
+                            <p:strVal val="visible"/>
+                          </p:to>
+                        </p:set>
+                        <p:animEffect transition="in" filter="fade">
+                          <p:cBhvr>
+                            <p:cTn id="101" dur="500"/>
+                            <p:tgtEl>
+                              <p:spTgt spid="309"/>
+                            </p:tgtEl>
+                          </p:cBhvr>
+                        </p:animEffect>
+                      </p:childTnLst>
+                    </p:cTn>
+                  </p:par>
+                  <p:par>
+                    <p:cTn id="7" presetID="10" presetClass="entr" presetSubtype="0" fill="hold" nodeType="afterPrev">
+                      <p:stCondLst>
+                        <p:cond delay="600"/>
+                      </p:stCondLst>
+                      <p:childTnLst>
+                        <p:set>
+                          <p:cBhvr>
+                            <p:cTn id="8" dur="1" fill="hold">
+                              <p:stCondLst>
+                                <p:cond delay="0"/>
+                              </p:stCondLst>
+                            </p:cTn>
+                            <p:tgtEl>
+                              <p:spTgt spid="310"/>
+                            </p:tgtEl>
+                            <p:attrNameLst>
+                              <p:attrName>style.visibility</p:attrName>
+                            </p:attrNameLst>
+                          </p:cBhvr>
+                          <p:to>
+                            <p:strVal val="visible"/>
+                          </p:to>
+                        </p:set>
+                        <p:animEffect transition="in" filter="fade">
+                          <p:cBhvr>
+                            <p:cTn id="102" dur="500"/>
+                            <p:tgtEl>
+                              <p:spTgt spid="310"/>
+                            </p:tgtEl>
+                          </p:cBhvr>
+                        </p:animEffect>
+                      </p:childTnLst>
+                    </p:cTn>
+                  </p:par>
+                </p:childTnLst>
+              </p:cTn>
+              <p:prevCondLst>
+                <p:cond evt="onPrev" delay="0">
+                  <p:tgtEl>
+                    <p:sldTgt/>
+                  </p:tgtEl>
+                </p:cond>
+              </p:prevCondLst>
+              <p:nextCondLst>
+                <p:cond evt="onNext" delay="0">
+                  <p:tgtEl>
+                    <p:sldTgt/>
+                  </p:tgtEl>
+                </p:cond>
+              </p:nextCondLst>
+            </p:seq>
+          </p:childTnLst>
+        </p:cTn>
+      </p:par>
+    </p:tnLst>
+  </p:timing>
 </p:sld>
 </file>
 
@@ -29990,6 +30890,249 @@
   <p:clrMapOvr>
     <a:masterClrMapping/>
   </p:clrMapOvr>
+  <p:transition spd="med" advClick="1">
+    <p:fade/>
+  </p:transition>
+  <p:timing>
+    <p:tnLst>
+      <p:par>
+        <p:cTn id="1" dur="indefinite" restart="never" nodeType="tmRoot">
+          <p:childTnLst>
+            <p:seq concurrent="1" nextAc="seek">
+              <p:cTn id="2" dur="indefinite" nodeType="mainSeq">
+                <p:childTnLst>
+                  <p:par>
+                    <p:cTn id="3" presetID="10" presetClass="entr" presetSubtype="0" fill="hold" nodeType="afterPrev">
+                      <p:stCondLst>
+                        <p:cond delay="0"/>
+                      </p:stCondLst>
+                      <p:childTnLst>
+                        <p:set>
+                          <p:cBhvr>
+                            <p:cTn id="4" dur="1" fill="hold">
+                              <p:stCondLst>
+                                <p:cond delay="0"/>
+                              </p:stCondLst>
+                            </p:cTn>
+                            <p:tgtEl>
+                              <p:spTgt spid="315"/>
+                            </p:tgtEl>
+                            <p:attrNameLst>
+                              <p:attrName>style.visibility</p:attrName>
+                            </p:attrNameLst>
+                          </p:cBhvr>
+                          <p:to>
+                            <p:strVal val="visible"/>
+                          </p:to>
+                        </p:set>
+                        <p:animEffect transition="in" filter="fade">
+                          <p:cBhvr>
+                            <p:cTn id="100" dur="500"/>
+                            <p:tgtEl>
+                              <p:spTgt spid="315"/>
+                            </p:tgtEl>
+                          </p:cBhvr>
+                        </p:animEffect>
+                      </p:childTnLst>
+                    </p:cTn>
+                  </p:par>
+                  <p:par>
+                    <p:cTn id="5" presetID="10" presetClass="entr" presetSubtype="0" fill="hold" nodeType="afterPrev">
+                      <p:stCondLst>
+                        <p:cond delay="300"/>
+                      </p:stCondLst>
+                      <p:childTnLst>
+                        <p:set>
+                          <p:cBhvr>
+                            <p:cTn id="6" dur="1" fill="hold">
+                              <p:stCondLst>
+                                <p:cond delay="0"/>
+                              </p:stCondLst>
+                            </p:cTn>
+                            <p:tgtEl>
+                              <p:spTgt spid="316"/>
+                            </p:tgtEl>
+                            <p:attrNameLst>
+                              <p:attrName>style.visibility</p:attrName>
+                            </p:attrNameLst>
+                          </p:cBhvr>
+                          <p:to>
+                            <p:strVal val="visible"/>
+                          </p:to>
+                        </p:set>
+                        <p:animEffect transition="in" filter="fade">
+                          <p:cBhvr>
+                            <p:cTn id="101" dur="500"/>
+                            <p:tgtEl>
+                              <p:spTgt spid="316"/>
+                            </p:tgtEl>
+                          </p:cBhvr>
+                        </p:animEffect>
+                      </p:childTnLst>
+                    </p:cTn>
+                  </p:par>
+                  <p:par>
+                    <p:cTn id="7" presetID="10" presetClass="entr" presetSubtype="0" fill="hold" nodeType="afterPrev">
+                      <p:stCondLst>
+                        <p:cond delay="600"/>
+                      </p:stCondLst>
+                      <p:childTnLst>
+                        <p:set>
+                          <p:cBhvr>
+                            <p:cTn id="8" dur="1" fill="hold">
+                              <p:stCondLst>
+                                <p:cond delay="0"/>
+                              </p:stCondLst>
+                            </p:cTn>
+                            <p:tgtEl>
+                              <p:spTgt spid="317"/>
+                            </p:tgtEl>
+                            <p:attrNameLst>
+                              <p:attrName>style.visibility</p:attrName>
+                            </p:attrNameLst>
+                          </p:cBhvr>
+                          <p:to>
+                            <p:strVal val="visible"/>
+                          </p:to>
+                        </p:set>
+                        <p:animEffect transition="in" filter="fade">
+                          <p:cBhvr>
+                            <p:cTn id="102" dur="500"/>
+                            <p:tgtEl>
+                              <p:spTgt spid="317"/>
+                            </p:tgtEl>
+                          </p:cBhvr>
+                        </p:animEffect>
+                      </p:childTnLst>
+                    </p:cTn>
+                  </p:par>
+                  <p:par>
+                    <p:cTn id="9" presetID="10" presetClass="entr" presetSubtype="0" fill="hold" nodeType="afterPrev">
+                      <p:stCondLst>
+                        <p:cond delay="900"/>
+                      </p:stCondLst>
+                      <p:childTnLst>
+                        <p:set>
+                          <p:cBhvr>
+                            <p:cTn id="10" dur="1" fill="hold">
+                              <p:stCondLst>
+                                <p:cond delay="0"/>
+                              </p:stCondLst>
+                            </p:cTn>
+                            <p:tgtEl>
+                              <p:spTgt spid="318"/>
+                            </p:tgtEl>
+                            <p:attrNameLst>
+                              <p:attrName>style.visibility</p:attrName>
+                            </p:attrNameLst>
+                          </p:cBhvr>
+                          <p:to>
+                            <p:strVal val="visible"/>
+                          </p:to>
+                        </p:set>
+                        <p:animEffect transition="in" filter="fade">
+                          <p:cBhvr>
+                            <p:cTn id="103" dur="500"/>
+                            <p:tgtEl>
+                              <p:spTgt spid="318"/>
+                            </p:tgtEl>
+                          </p:cBhvr>
+                        </p:animEffect>
+                      </p:childTnLst>
+                    </p:cTn>
+                  </p:par>
+                  <p:par>
+                    <p:cTn id="11" presetID="10" presetClass="entr" presetSubtype="0" fill="hold" nodeType="afterPrev">
+                      <p:stCondLst>
+                        <p:cond delay="1200"/>
+                      </p:stCondLst>
+                      <p:childTnLst>
+                        <p:set>
+                          <p:cBhvr>
+                            <p:cTn id="12" dur="1" fill="hold">
+                              <p:stCondLst>
+                                <p:cond delay="0"/>
+                              </p:stCondLst>
+                            </p:cTn>
+                            <p:tgtEl>
+                              <p:spTgt spid="319"/>
+                            </p:tgtEl>
+                            <p:attrNameLst>
+                              <p:attrName>style.visibility</p:attrName>
+                            </p:attrNameLst>
+                          </p:cBhvr>
+                          <p:to>
+                            <p:strVal val="visible"/>
+                          </p:to>
+                        </p:set>
+                        <p:animEffect transition="in" filter="fade">
+                          <p:cBhvr>
+                            <p:cTn id="104" dur="500"/>
+                            <p:tgtEl>
+                              <p:spTgt spid="319"/>
+                            </p:tgtEl>
+                          </p:cBhvr>
+                        </p:animEffect>
+                      </p:childTnLst>
+                    </p:cTn>
+                  </p:par>
+                  <p:par>
+                    <p:cTn id="13" presetID="10" presetClass="entr" presetSubtype="0" fill="hold" nodeType="afterPrev">
+                      <p:stCondLst>
+                        <p:cond delay="1500"/>
+                      </p:stCondLst>
+                      <p:childTnLst>
+                        <p:set>
+                          <p:cBhvr>
+                            <p:cTn id="14" dur="1" fill="hold">
+                              <p:stCondLst>
+                                <p:cond delay="0"/>
+                              </p:stCondLst>
+                            </p:cTn>
+                            <p:tgtEl>
+                              <p:spTgt spid="320"/>
+                            </p:tgtEl>
+                            <p:attrNameLst>
+                              <p:attrName>style.visibility</p:attrName>
+                            </p:attrNameLst>
+                          </p:cBhvr>
+                          <p:to>
+                            <p:strVal val="visible"/>
+                          </p:to>
+                        </p:set>
+                        <p:animEffect transition="in" filter="fade">
+                          <p:cBhvr>
+                            <p:cTn id="105" dur="500"/>
+                            <p:tgtEl>
+                              <p:spTgt spid="320"/>
+                            </p:tgtEl>
+                          </p:cBhvr>
+                        </p:animEffect>
+                      </p:childTnLst>
+                    </p:cTn>
+                  </p:par>
+                </p:childTnLst>
+              </p:cTn>
+              <p:prevCondLst>
+                <p:cond evt="onPrev" delay="0">
+                  <p:tgtEl>
+                    <p:sldTgt/>
+                  </p:tgtEl>
+                </p:cond>
+              </p:prevCondLst>
+              <p:nextCondLst>
+                <p:cond evt="onNext" delay="0">
+                  <p:tgtEl>
+                    <p:sldTgt/>
+                  </p:tgtEl>
+                </p:cond>
+              </p:nextCondLst>
+            </p:seq>
+          </p:childTnLst>
+        </p:cTn>
+      </p:par>
+    </p:tnLst>
+  </p:timing>
 </p:sld>
 </file>
 
@@ -30168,6 +31311,144 @@
   <p:clrMapOvr>
     <a:masterClrMapping/>
   </p:clrMapOvr>
+  <p:transition spd="med" advClick="1">
+    <p:fade/>
+  </p:transition>
+  <p:timing>
+    <p:tnLst>
+      <p:par>
+        <p:cTn id="1" dur="indefinite" restart="never" nodeType="tmRoot">
+          <p:childTnLst>
+            <p:seq concurrent="1" nextAc="seek">
+              <p:cTn id="2" dur="indefinite" nodeType="mainSeq">
+                <p:childTnLst>
+                  <p:par>
+                    <p:cTn id="3" presetID="10" presetClass="entr" presetSubtype="0" fill="hold" nodeType="afterPrev">
+                      <p:stCondLst>
+                        <p:cond delay="0"/>
+                      </p:stCondLst>
+                      <p:childTnLst>
+                        <p:set>
+                          <p:cBhvr>
+                            <p:cTn id="4" dur="1" fill="hold">
+                              <p:stCondLst>
+                                <p:cond delay="0"/>
+                              </p:stCondLst>
+                            </p:cTn>
+                            <p:tgtEl>
+                              <p:spTgt spid="342"/>
+                            </p:tgtEl>
+                            <p:attrNameLst>
+                              <p:attrName>style.visibility</p:attrName>
+                            </p:attrNameLst>
+                          </p:cBhvr>
+                          <p:to>
+                            <p:strVal val="visible"/>
+                          </p:to>
+                        </p:set>
+                        <p:animEffect transition="in" filter="fade">
+                          <p:cBhvr>
+                            <p:cTn id="100" dur="500"/>
+                            <p:tgtEl>
+                              <p:spTgt spid="342"/>
+                            </p:tgtEl>
+                          </p:cBhvr>
+                        </p:animEffect>
+                      </p:childTnLst>
+                    </p:cTn>
+                  </p:par>
+                  <p:par>
+                    <p:cTn id="5" presetID="10" presetClass="entr" presetSubtype="0" fill="hold" nodeType="afterPrev">
+                      <p:stCondLst>
+                        <p:cond delay="300"/>
+                      </p:stCondLst>
+                      <p:childTnLst>
+                        <p:set>
+                          <p:cBhvr>
+                            <p:cTn id="6" dur="1" fill="hold">
+                              <p:stCondLst>
+                                <p:cond delay="0"/>
+                              </p:stCondLst>
+                            </p:cTn>
+                            <p:tgtEl>
+                              <p:spTgt spid="343"/>
+                            </p:tgtEl>
+                            <p:attrNameLst>
+                              <p:attrName>style.visibility</p:attrName>
+                            </p:attrNameLst>
+                          </p:cBhvr>
+                          <p:to>
+                            <p:strVal val="visible"/>
+                          </p:to>
+                        </p:set>
+                        <p:animEffect transition="in" filter="fade">
+                          <p:cBhvr>
+                            <p:cTn id="101" dur="500"/>
+                            <p:tgtEl>
+                              <p:spTgt spid="343"/>
+                            </p:tgtEl>
+                          </p:cBhvr>
+                        </p:animEffect>
+                      </p:childTnLst>
+                    </p:cTn>
+                  </p:par>
+                  <p:par>
+                    <p:cTn id="7" presetID="10" presetClass="entr" presetSubtype="0" fill="hold" nodeType="afterPrev">
+                      <p:stCondLst>
+                        <p:cond delay="600"/>
+                      </p:stCondLst>
+                      <p:childTnLst>
+                        <p:set>
+                          <p:cBhvr>
+                            <p:cTn id="8" dur="1" fill="hold">
+                              <p:stCondLst>
+                                <p:cond delay="0"/>
+                              </p:stCondLst>
+                            </p:cTn>
+                            <p:tgtEl>
+                              <p:spTgt spid="344"/>
+                            </p:tgtEl>
+                            <p:attrNameLst>
+                              <p:attrName>style.visibility</p:attrName>
+                            </p:attrNameLst>
+                          </p:cBhvr>
+                          <p:to>
+                            <p:strVal val="visible"/>
+                          </p:to>
+                        </p:set>
+                        <p:animEffect transition="in" filter="fade">
+                          <p:cBhvr>
+                            <p:cTn id="102" dur="500"/>
+                            <p:tgtEl>
+                              <p:spTgt spid="344"/>
+                            </p:tgtEl>
+                          </p:cBhvr>
+                        </p:animEffect>
+                      </p:childTnLst>
+                    </p:cTn>
+                  </p:par>
+                </p:childTnLst>
+              </p:cTn>
+              <p:prevCondLst>
+                <p:cond evt="onPrev" delay="0">
+                  <p:tgtEl>
+                    <p:sldTgt/>
+                  </p:tgtEl>
+                </p:cond>
+              </p:prevCondLst>
+              <p:nextCondLst>
+                <p:cond evt="onNext" delay="0">
+                  <p:tgtEl>
+                    <p:sldTgt/>
+                  </p:tgtEl>
+                </p:cond>
+              </p:nextCondLst>
+            </p:seq>
+          </p:childTnLst>
+        </p:cTn>
+      </p:par>
+    </p:tnLst>
+  </p:timing>
 </p:sld>
 </file>
 
@@ -32304,6 +33585,249 @@
   <p:clrMapOvr>
     <a:masterClrMapping/>
   </p:clrMapOvr>
+  <p:transition spd="med" advClick="1">
+    <p:fade/>
+  </p:transition>
+  <p:timing>
+    <p:tnLst>
+      <p:par>
+        <p:cTn id="1" dur="indefinite" restart="never" nodeType="tmRoot">
+          <p:childTnLst>
+            <p:seq concurrent="1" nextAc="seek">
+              <p:cTn id="2" dur="indefinite" nodeType="mainSeq">
+                <p:childTnLst>
+                  <p:par>
+                    <p:cTn id="3" presetID="10" presetClass="entr" presetSubtype="0" fill="hold" nodeType="afterPrev">
+                      <p:stCondLst>
+                        <p:cond delay="0"/>
+                      </p:stCondLst>
+                      <p:childTnLst>
+                        <p:set>
+                          <p:cBhvr>
+                            <p:cTn id="4" dur="1" fill="hold">
+                              <p:stCondLst>
+                                <p:cond delay="0"/>
+                              </p:stCondLst>
+                            </p:cTn>
+                            <p:tgtEl>
+                              <p:spTgt spid="349"/>
+                            </p:tgtEl>
+                            <p:attrNameLst>
+                              <p:attrName>style.visibility</p:attrName>
+                            </p:attrNameLst>
+                          </p:cBhvr>
+                          <p:to>
+                            <p:strVal val="visible"/>
+                          </p:to>
+                        </p:set>
+                        <p:animEffect transition="in" filter="fade">
+                          <p:cBhvr>
+                            <p:cTn id="100" dur="500"/>
+                            <p:tgtEl>
+                              <p:spTgt spid="349"/>
+                            </p:tgtEl>
+                          </p:cBhvr>
+                        </p:animEffect>
+                      </p:childTnLst>
+                    </p:cTn>
+                  </p:par>
+                  <p:par>
+                    <p:cTn id="5" presetID="10" presetClass="entr" presetSubtype="0" fill="hold" nodeType="afterPrev">
+                      <p:stCondLst>
+                        <p:cond delay="300"/>
+                      </p:stCondLst>
+                      <p:childTnLst>
+                        <p:set>
+                          <p:cBhvr>
+                            <p:cTn id="6" dur="1" fill="hold">
+                              <p:stCondLst>
+                                <p:cond delay="0"/>
+                              </p:stCondLst>
+                            </p:cTn>
+                            <p:tgtEl>
+                              <p:spTgt spid="350"/>
+                            </p:tgtEl>
+                            <p:attrNameLst>
+                              <p:attrName>style.visibility</p:attrName>
+                            </p:attrNameLst>
+                          </p:cBhvr>
+                          <p:to>
+                            <p:strVal val="visible"/>
+                          </p:to>
+                        </p:set>
+                        <p:animEffect transition="in" filter="fade">
+                          <p:cBhvr>
+                            <p:cTn id="101" dur="500"/>
+                            <p:tgtEl>
+                              <p:spTgt spid="350"/>
+                            </p:tgtEl>
+                          </p:cBhvr>
+                        </p:animEffect>
+                      </p:childTnLst>
+                    </p:cTn>
+                  </p:par>
+                  <p:par>
+                    <p:cTn id="7" presetID="10" presetClass="entr" presetSubtype="0" fill="hold" nodeType="afterPrev">
+                      <p:stCondLst>
+                        <p:cond delay="600"/>
+                      </p:stCondLst>
+                      <p:childTnLst>
+                        <p:set>
+                          <p:cBhvr>
+                            <p:cTn id="8" dur="1" fill="hold">
+                              <p:stCondLst>
+                                <p:cond delay="0"/>
+                              </p:stCondLst>
+                            </p:cTn>
+                            <p:tgtEl>
+                              <p:spTgt spid="351"/>
+                            </p:tgtEl>
+                            <p:attrNameLst>
+                              <p:attrName>style.visibility</p:attrName>
+                            </p:attrNameLst>
+                          </p:cBhvr>
+                          <p:to>
+                            <p:strVal val="visible"/>
+                          </p:to>
+                        </p:set>
+                        <p:animEffect transition="in" filter="fade">
+                          <p:cBhvr>
+                            <p:cTn id="102" dur="500"/>
+                            <p:tgtEl>
+                              <p:spTgt spid="351"/>
+                            </p:tgtEl>
+                          </p:cBhvr>
+                        </p:animEffect>
+                      </p:childTnLst>
+                    </p:cTn>
+                  </p:par>
+                  <p:par>
+                    <p:cTn id="9" presetID="10" presetClass="entr" presetSubtype="0" fill="hold" nodeType="afterPrev">
+                      <p:stCondLst>
+                        <p:cond delay="900"/>
+                      </p:stCondLst>
+                      <p:childTnLst>
+                        <p:set>
+                          <p:cBhvr>
+                            <p:cTn id="10" dur="1" fill="hold">
+                              <p:stCondLst>
+                                <p:cond delay="0"/>
+                              </p:stCondLst>
+                            </p:cTn>
+                            <p:tgtEl>
+                              <p:spTgt spid="352"/>
+                            </p:tgtEl>
+                            <p:attrNameLst>
+                              <p:attrName>style.visibility</p:attrName>
+                            </p:attrNameLst>
+                          </p:cBhvr>
+                          <p:to>
+                            <p:strVal val="visible"/>
+                          </p:to>
+                        </p:set>
+                        <p:animEffect transition="in" filter="fade">
+                          <p:cBhvr>
+                            <p:cTn id="103" dur="500"/>
+                            <p:tgtEl>
+                              <p:spTgt spid="352"/>
+                            </p:tgtEl>
+                          </p:cBhvr>
+                        </p:animEffect>
+                      </p:childTnLst>
+                    </p:cTn>
+                  </p:par>
+                  <p:par>
+                    <p:cTn id="11" presetID="10" presetClass="entr" presetSubtype="0" fill="hold" nodeType="afterPrev">
+                      <p:stCondLst>
+                        <p:cond delay="1200"/>
+                      </p:stCondLst>
+                      <p:childTnLst>
+                        <p:set>
+                          <p:cBhvr>
+                            <p:cTn id="12" dur="1" fill="hold">
+                              <p:stCondLst>
+                                <p:cond delay="0"/>
+                              </p:stCondLst>
+                            </p:cTn>
+                            <p:tgtEl>
+                              <p:spTgt spid="353"/>
+                            </p:tgtEl>
+                            <p:attrNameLst>
+                              <p:attrName>style.visibility</p:attrName>
+                            </p:attrNameLst>
+                          </p:cBhvr>
+                          <p:to>
+                            <p:strVal val="visible"/>
+                          </p:to>
+                        </p:set>
+                        <p:animEffect transition="in" filter="fade">
+                          <p:cBhvr>
+                            <p:cTn id="104" dur="500"/>
+                            <p:tgtEl>
+                              <p:spTgt spid="353"/>
+                            </p:tgtEl>
+                          </p:cBhvr>
+                        </p:animEffect>
+                      </p:childTnLst>
+                    </p:cTn>
+                  </p:par>
+                  <p:par>
+                    <p:cTn id="13" presetID="10" presetClass="entr" presetSubtype="0" fill="hold" nodeType="afterPrev">
+                      <p:stCondLst>
+                        <p:cond delay="1500"/>
+                      </p:stCondLst>
+                      <p:childTnLst>
+                        <p:set>
+                          <p:cBhvr>
+                            <p:cTn id="14" dur="1" fill="hold">
+                              <p:stCondLst>
+                                <p:cond delay="0"/>
+                              </p:stCondLst>
+                            </p:cTn>
+                            <p:tgtEl>
+                              <p:spTgt spid="354"/>
+                            </p:tgtEl>
+                            <p:attrNameLst>
+                              <p:attrName>style.visibility</p:attrName>
+                            </p:attrNameLst>
+                          </p:cBhvr>
+                          <p:to>
+                            <p:strVal val="visible"/>
+                          </p:to>
+                        </p:set>
+                        <p:animEffect transition="in" filter="fade">
+                          <p:cBhvr>
+                            <p:cTn id="105" dur="500"/>
+                            <p:tgtEl>
+                              <p:spTgt spid="354"/>
+                            </p:tgtEl>
+                          </p:cBhvr>
+                        </p:animEffect>
+                      </p:childTnLst>
+                    </p:cTn>
+                  </p:par>
+                </p:childTnLst>
+              </p:cTn>
+              <p:prevCondLst>
+                <p:cond evt="onPrev" delay="0">
+                  <p:tgtEl>
+                    <p:sldTgt/>
+                  </p:tgtEl>
+                </p:cond>
+              </p:prevCondLst>
+              <p:nextCondLst>
+                <p:cond evt="onNext" delay="0">
+                  <p:tgtEl>
+                    <p:sldTgt/>
+                  </p:tgtEl>
+                </p:cond>
+              </p:nextCondLst>
+            </p:seq>
+          </p:childTnLst>
+        </p:cTn>
+      </p:par>
+    </p:tnLst>
+  </p:timing>
 </p:sld>
 </file>
 
@@ -32818,6 +34342,249 @@
   <p:clrMapOvr>
     <a:masterClrMapping/>
   </p:clrMapOvr>
+  <p:transition spd="med" advClick="1">
+    <p:wipe dir="l"/>
+  </p:transition>
+  <p:timing>
+    <p:tnLst>
+      <p:par>
+        <p:cTn id="1" dur="indefinite" restart="never" nodeType="tmRoot">
+          <p:childTnLst>
+            <p:seq concurrent="1" nextAc="seek">
+              <p:cTn id="2" dur="indefinite" nodeType="mainSeq">
+                <p:childTnLst>
+                  <p:par>
+                    <p:cTn id="3" presetID="10" presetClass="entr" presetSubtype="0" fill="hold" nodeType="afterPrev">
+                      <p:stCondLst>
+                        <p:cond delay="0"/>
+                      </p:stCondLst>
+                      <p:childTnLst>
+                        <p:set>
+                          <p:cBhvr>
+                            <p:cTn id="4" dur="1" fill="hold">
+                              <p:stCondLst>
+                                <p:cond delay="0"/>
+                              </p:stCondLst>
+                            </p:cTn>
+                            <p:tgtEl>
+                              <p:spTgt spid="381"/>
+                            </p:tgtEl>
+                            <p:attrNameLst>
+                              <p:attrName>style.visibility</p:attrName>
+                            </p:attrNameLst>
+                          </p:cBhvr>
+                          <p:to>
+                            <p:strVal val="visible"/>
+                          </p:to>
+                        </p:set>
+                        <p:animEffect transition="in" filter="fade">
+                          <p:cBhvr>
+                            <p:cTn id="100" dur="500"/>
+                            <p:tgtEl>
+                              <p:spTgt spid="381"/>
+                            </p:tgtEl>
+                          </p:cBhvr>
+                        </p:animEffect>
+                      </p:childTnLst>
+                    </p:cTn>
+                  </p:par>
+                  <p:par>
+                    <p:cTn id="5" presetID="10" presetClass="entr" presetSubtype="0" fill="hold" nodeType="afterPrev">
+                      <p:stCondLst>
+                        <p:cond delay="300"/>
+                      </p:stCondLst>
+                      <p:childTnLst>
+                        <p:set>
+                          <p:cBhvr>
+                            <p:cTn id="6" dur="1" fill="hold">
+                              <p:stCondLst>
+                                <p:cond delay="0"/>
+                              </p:stCondLst>
+                            </p:cTn>
+                            <p:tgtEl>
+                              <p:spTgt spid="382"/>
+                            </p:tgtEl>
+                            <p:attrNameLst>
+                              <p:attrName>style.visibility</p:attrName>
+                            </p:attrNameLst>
+                          </p:cBhvr>
+                          <p:to>
+                            <p:strVal val="visible"/>
+                          </p:to>
+                        </p:set>
+                        <p:animEffect transition="in" filter="fade">
+                          <p:cBhvr>
+                            <p:cTn id="101" dur="500"/>
+                            <p:tgtEl>
+                              <p:spTgt spid="382"/>
+                            </p:tgtEl>
+                          </p:cBhvr>
+                        </p:animEffect>
+                      </p:childTnLst>
+                    </p:cTn>
+                  </p:par>
+                  <p:par>
+                    <p:cTn id="7" presetID="10" presetClass="entr" presetSubtype="0" fill="hold" nodeType="afterPrev">
+                      <p:stCondLst>
+                        <p:cond delay="600"/>
+                      </p:stCondLst>
+                      <p:childTnLst>
+                        <p:set>
+                          <p:cBhvr>
+                            <p:cTn id="8" dur="1" fill="hold">
+                              <p:stCondLst>
+                                <p:cond delay="0"/>
+                              </p:stCondLst>
+                            </p:cTn>
+                            <p:tgtEl>
+                              <p:spTgt spid="383"/>
+                            </p:tgtEl>
+                            <p:attrNameLst>
+                              <p:attrName>style.visibility</p:attrName>
+                            </p:attrNameLst>
+                          </p:cBhvr>
+                          <p:to>
+                            <p:strVal val="visible"/>
+                          </p:to>
+                        </p:set>
+                        <p:animEffect transition="in" filter="fade">
+                          <p:cBhvr>
+                            <p:cTn id="102" dur="500"/>
+                            <p:tgtEl>
+                              <p:spTgt spid="383"/>
+                            </p:tgtEl>
+                          </p:cBhvr>
+                        </p:animEffect>
+                      </p:childTnLst>
+                    </p:cTn>
+                  </p:par>
+                  <p:par>
+                    <p:cTn id="9" presetID="10" presetClass="entr" presetSubtype="0" fill="hold" nodeType="afterPrev">
+                      <p:stCondLst>
+                        <p:cond delay="900"/>
+                      </p:stCondLst>
+                      <p:childTnLst>
+                        <p:set>
+                          <p:cBhvr>
+                            <p:cTn id="10" dur="1" fill="hold">
+                              <p:stCondLst>
+                                <p:cond delay="0"/>
+                              </p:stCondLst>
+                            </p:cTn>
+                            <p:tgtEl>
+                              <p:spTgt spid="384"/>
+                            </p:tgtEl>
+                            <p:attrNameLst>
+                              <p:attrName>style.visibility</p:attrName>
+                            </p:attrNameLst>
+                          </p:cBhvr>
+                          <p:to>
+                            <p:strVal val="visible"/>
+                          </p:to>
+                        </p:set>
+                        <p:animEffect transition="in" filter="fade">
+                          <p:cBhvr>
+                            <p:cTn id="103" dur="500"/>
+                            <p:tgtEl>
+                              <p:spTgt spid="384"/>
+                            </p:tgtEl>
+                          </p:cBhvr>
+                        </p:animEffect>
+                      </p:childTnLst>
+                    </p:cTn>
+                  </p:par>
+                  <p:par>
+                    <p:cTn id="11" presetID="10" presetClass="entr" presetSubtype="0" fill="hold" nodeType="afterPrev">
+                      <p:stCondLst>
+                        <p:cond delay="1200"/>
+                      </p:stCondLst>
+                      <p:childTnLst>
+                        <p:set>
+                          <p:cBhvr>
+                            <p:cTn id="12" dur="1" fill="hold">
+                              <p:stCondLst>
+                                <p:cond delay="0"/>
+                              </p:stCondLst>
+                            </p:cTn>
+                            <p:tgtEl>
+                              <p:spTgt spid="385"/>
+                            </p:tgtEl>
+                            <p:attrNameLst>
+                              <p:attrName>style.visibility</p:attrName>
+                            </p:attrNameLst>
+                          </p:cBhvr>
+                          <p:to>
+                            <p:strVal val="visible"/>
+                          </p:to>
+                        </p:set>
+                        <p:animEffect transition="in" filter="fade">
+                          <p:cBhvr>
+                            <p:cTn id="104" dur="500"/>
+                            <p:tgtEl>
+                              <p:spTgt spid="385"/>
+                            </p:tgtEl>
+                          </p:cBhvr>
+                        </p:animEffect>
+                      </p:childTnLst>
+                    </p:cTn>
+                  </p:par>
+                  <p:par>
+                    <p:cTn id="13" presetID="10" presetClass="entr" presetSubtype="0" fill="hold" nodeType="afterPrev">
+                      <p:stCondLst>
+                        <p:cond delay="1500"/>
+                      </p:stCondLst>
+                      <p:childTnLst>
+                        <p:set>
+                          <p:cBhvr>
+                            <p:cTn id="14" dur="1" fill="hold">
+                              <p:stCondLst>
+                                <p:cond delay="0"/>
+                              </p:stCondLst>
+                            </p:cTn>
+                            <p:tgtEl>
+                              <p:spTgt spid="386"/>
+                            </p:tgtEl>
+                            <p:attrNameLst>
+                              <p:attrName>style.visibility</p:attrName>
+                            </p:attrNameLst>
+                          </p:cBhvr>
+                          <p:to>
+                            <p:strVal val="visible"/>
+                          </p:to>
+                        </p:set>
+                        <p:animEffect transition="in" filter="fade">
+                          <p:cBhvr>
+                            <p:cTn id="105" dur="500"/>
+                            <p:tgtEl>
+                              <p:spTgt spid="386"/>
+                            </p:tgtEl>
+                          </p:cBhvr>
+                        </p:animEffect>
+                      </p:childTnLst>
+                    </p:cTn>
+                  </p:par>
+                </p:childTnLst>
+              </p:cTn>
+              <p:prevCondLst>
+                <p:cond evt="onPrev" delay="0">
+                  <p:tgtEl>
+                    <p:sldTgt/>
+                  </p:tgtEl>
+                </p:cond>
+              </p:prevCondLst>
+              <p:nextCondLst>
+                <p:cond evt="onNext" delay="0">
+                  <p:tgtEl>
+                    <p:sldTgt/>
+                  </p:tgtEl>
+                </p:cond>
+              </p:nextCondLst>
+            </p:seq>
+          </p:childTnLst>
+        </p:cTn>
+      </p:par>
+    </p:tnLst>
+  </p:timing>
 </p:sld>
 </file>
 
@@ -33299,6 +35066,249 @@
   <p:clrMapOvr>
     <a:masterClrMapping/>
   </p:clrMapOvr>
+  <p:transition spd="med" advClick="1">
+    <p:wipe dir="l"/>
+  </p:transition>
+  <p:timing>
+    <p:tnLst>
+      <p:par>
+        <p:cTn id="1" dur="indefinite" restart="never" nodeType="tmRoot">
+          <p:childTnLst>
+            <p:seq concurrent="1" nextAc="seek">
+              <p:cTn id="2" dur="indefinite" nodeType="mainSeq">
+                <p:childTnLst>
+                  <p:par>
+                    <p:cTn id="3" presetID="10" presetClass="entr" presetSubtype="0" fill="hold" nodeType="afterPrev">
+                      <p:stCondLst>
+                        <p:cond delay="0"/>
+                      </p:stCondLst>
+                      <p:childTnLst>
+                        <p:set>
+                          <p:cBhvr>
+                            <p:cTn id="4" dur="1" fill="hold">
+                              <p:stCondLst>
+                                <p:cond delay="0"/>
+                              </p:stCondLst>
+                            </p:cTn>
+                            <p:tgtEl>
+                              <p:spTgt spid="393"/>
+                            </p:tgtEl>
+                            <p:attrNameLst>
+                              <p:attrName>style.visibility</p:attrName>
+                            </p:attrNameLst>
+                          </p:cBhvr>
+                          <p:to>
+                            <p:strVal val="visible"/>
+                          </p:to>
+                        </p:set>
+                        <p:animEffect transition="in" filter="fade">
+                          <p:cBhvr>
+                            <p:cTn id="100" dur="500"/>
+                            <p:tgtEl>
+                              <p:spTgt spid="393"/>
+                            </p:tgtEl>
+                          </p:cBhvr>
+                        </p:animEffect>
+                      </p:childTnLst>
+                    </p:cTn>
+                  </p:par>
+                  <p:par>
+                    <p:cTn id="5" presetID="10" presetClass="entr" presetSubtype="0" fill="hold" nodeType="afterPrev">
+                      <p:stCondLst>
+                        <p:cond delay="300"/>
+                      </p:stCondLst>
+                      <p:childTnLst>
+                        <p:set>
+                          <p:cBhvr>
+                            <p:cTn id="6" dur="1" fill="hold">
+                              <p:stCondLst>
+                                <p:cond delay="0"/>
+                              </p:stCondLst>
+                            </p:cTn>
+                            <p:tgtEl>
+                              <p:spTgt spid="394"/>
+                            </p:tgtEl>
+                            <p:attrNameLst>
+                              <p:attrName>style.visibility</p:attrName>
+                            </p:attrNameLst>
+                          </p:cBhvr>
+                          <p:to>
+                            <p:strVal val="visible"/>
+                          </p:to>
+                        </p:set>
+                        <p:animEffect transition="in" filter="fade">
+                          <p:cBhvr>
+                            <p:cTn id="101" dur="500"/>
+                            <p:tgtEl>
+                              <p:spTgt spid="394"/>
+                            </p:tgtEl>
+                          </p:cBhvr>
+                        </p:animEffect>
+                      </p:childTnLst>
+                    </p:cTn>
+                  </p:par>
+                  <p:par>
+                    <p:cTn id="7" presetID="10" presetClass="entr" presetSubtype="0" fill="hold" nodeType="afterPrev">
+                      <p:stCondLst>
+                        <p:cond delay="600"/>
+                      </p:stCondLst>
+                      <p:childTnLst>
+                        <p:set>
+                          <p:cBhvr>
+                            <p:cTn id="8" dur="1" fill="hold">
+                              <p:stCondLst>
+                                <p:cond delay="0"/>
+                              </p:stCondLst>
+                            </p:cTn>
+                            <p:tgtEl>
+                              <p:spTgt spid="395"/>
+                            </p:tgtEl>
+                            <p:attrNameLst>
+                              <p:attrName>style.visibility</p:attrName>
+                            </p:attrNameLst>
+                          </p:cBhvr>
+                          <p:to>
+                            <p:strVal val="visible"/>
+                          </p:to>
+                        </p:set>
+                        <p:animEffect transition="in" filter="fade">
+                          <p:cBhvr>
+                            <p:cTn id="102" dur="500"/>
+                            <p:tgtEl>
+                              <p:spTgt spid="395"/>
+                            </p:tgtEl>
+                          </p:cBhvr>
+                        </p:animEffect>
+                      </p:childTnLst>
+                    </p:cTn>
+                  </p:par>
+                  <p:par>
+                    <p:cTn id="9" presetID="10" presetClass="entr" presetSubtype="0" fill="hold" nodeType="afterPrev">
+                      <p:stCondLst>
+                        <p:cond delay="900"/>
+                      </p:stCondLst>
+                      <p:childTnLst>
+                        <p:set>
+                          <p:cBhvr>
+                            <p:cTn id="10" dur="1" fill="hold">
+                              <p:stCondLst>
+                                <p:cond delay="0"/>
+                              </p:stCondLst>
+                            </p:cTn>
+                            <p:tgtEl>
+                              <p:spTgt spid="396"/>
+                            </p:tgtEl>
+                            <p:attrNameLst>
+                              <p:attrName>style.visibility</p:attrName>
+                            </p:attrNameLst>
+                          </p:cBhvr>
+                          <p:to>
+                            <p:strVal val="visible"/>
+                          </p:to>
+                        </p:set>
+                        <p:animEffect transition="in" filter="fade">
+                          <p:cBhvr>
+                            <p:cTn id="103" dur="500"/>
+                            <p:tgtEl>
+                              <p:spTgt spid="396"/>
+                            </p:tgtEl>
+                          </p:cBhvr>
+                        </p:animEffect>
+                      </p:childTnLst>
+                    </p:cTn>
+                  </p:par>
+                  <p:par>
+                    <p:cTn id="11" presetID="10" presetClass="entr" presetSubtype="0" fill="hold" nodeType="afterPrev">
+                      <p:stCondLst>
+                        <p:cond delay="1200"/>
+                      </p:stCondLst>
+                      <p:childTnLst>
+                        <p:set>
+                          <p:cBhvr>
+                            <p:cTn id="12" dur="1" fill="hold">
+                              <p:stCondLst>
+                                <p:cond delay="0"/>
+                              </p:stCondLst>
+                            </p:cTn>
+                            <p:tgtEl>
+                              <p:spTgt spid="397"/>
+                            </p:tgtEl>
+                            <p:attrNameLst>
+                              <p:attrName>style.visibility</p:attrName>
+                            </p:attrNameLst>
+                          </p:cBhvr>
+                          <p:to>
+                            <p:strVal val="visible"/>
+                          </p:to>
+                        </p:set>
+                        <p:animEffect transition="in" filter="fade">
+                          <p:cBhvr>
+                            <p:cTn id="104" dur="500"/>
+                            <p:tgtEl>
+                              <p:spTgt spid="397"/>
+                            </p:tgtEl>
+                          </p:cBhvr>
+                        </p:animEffect>
+                      </p:childTnLst>
+                    </p:cTn>
+                  </p:par>
+                  <p:par>
+                    <p:cTn id="13" presetID="10" presetClass="entr" presetSubtype="0" fill="hold" nodeType="afterPrev">
+                      <p:stCondLst>
+                        <p:cond delay="1500"/>
+                      </p:stCondLst>
+                      <p:childTnLst>
+                        <p:set>
+                          <p:cBhvr>
+                            <p:cTn id="14" dur="1" fill="hold">
+                              <p:stCondLst>
+                                <p:cond delay="0"/>
+                              </p:stCondLst>
+                            </p:cTn>
+                            <p:tgtEl>
+                              <p:spTgt spid="398"/>
+                            </p:tgtEl>
+                            <p:attrNameLst>
+                              <p:attrName>style.visibility</p:attrName>
+                            </p:attrNameLst>
+                          </p:cBhvr>
+                          <p:to>
+                            <p:strVal val="visible"/>
+                          </p:to>
+                        </p:set>
+                        <p:animEffect transition="in" filter="fade">
+                          <p:cBhvr>
+                            <p:cTn id="105" dur="500"/>
+                            <p:tgtEl>
+                              <p:spTgt spid="398"/>
+                            </p:tgtEl>
+                          </p:cBhvr>
+                        </p:animEffect>
+                      </p:childTnLst>
+                    </p:cTn>
+                  </p:par>
+                </p:childTnLst>
+              </p:cTn>
+              <p:prevCondLst>
+                <p:cond evt="onPrev" delay="0">
+                  <p:tgtEl>
+                    <p:sldTgt/>
+                  </p:tgtEl>
+                </p:cond>
+              </p:prevCondLst>
+              <p:nextCondLst>
+                <p:cond evt="onNext" delay="0">
+                  <p:tgtEl>
+                    <p:sldTgt/>
+                  </p:tgtEl>
+                </p:cond>
+              </p:nextCondLst>
+            </p:seq>
+          </p:childTnLst>
+        </p:cTn>
+      </p:par>
+    </p:tnLst>
+  </p:timing>
 </p:sld>
 </file>
 
@@ -34219,6 +36229,249 @@
   <p:clrMapOvr>
     <a:masterClrMapping/>
   </p:clrMapOvr>
+  <p:transition spd="med" advClick="1">
+    <p:fade/>
+  </p:transition>
+  <p:timing>
+    <p:tnLst>
+      <p:par>
+        <p:cTn id="1" dur="indefinite" restart="never" nodeType="tmRoot">
+          <p:childTnLst>
+            <p:seq concurrent="1" nextAc="seek">
+              <p:cTn id="2" dur="indefinite" nodeType="mainSeq">
+                <p:childTnLst>
+                  <p:par>
+                    <p:cTn id="3" presetID="10" presetClass="entr" presetSubtype="0" fill="hold" nodeType="afterPrev">
+                      <p:stCondLst>
+                        <p:cond delay="0"/>
+                      </p:stCondLst>
+                      <p:childTnLst>
+                        <p:set>
+                          <p:cBhvr>
+                            <p:cTn id="4" dur="1" fill="hold">
+                              <p:stCondLst>
+                                <p:cond delay="0"/>
+                              </p:stCondLst>
+                            </p:cTn>
+                            <p:tgtEl>
+                              <p:spTgt spid="405"/>
+                            </p:tgtEl>
+                            <p:attrNameLst>
+                              <p:attrName>style.visibility</p:attrName>
+                            </p:attrNameLst>
+                          </p:cBhvr>
+                          <p:to>
+                            <p:strVal val="visible"/>
+                          </p:to>
+                        </p:set>
+                        <p:animEffect transition="in" filter="fade">
+                          <p:cBhvr>
+                            <p:cTn id="100" dur="500"/>
+                            <p:tgtEl>
+                              <p:spTgt spid="405"/>
+                            </p:tgtEl>
+                          </p:cBhvr>
+                        </p:animEffect>
+                      </p:childTnLst>
+                    </p:cTn>
+                  </p:par>
+                  <p:par>
+                    <p:cTn id="5" presetID="10" presetClass="entr" presetSubtype="0" fill="hold" nodeType="afterPrev">
+                      <p:stCondLst>
+                        <p:cond delay="300"/>
+                      </p:stCondLst>
+                      <p:childTnLst>
+                        <p:set>
+                          <p:cBhvr>
+                            <p:cTn id="6" dur="1" fill="hold">
+                              <p:stCondLst>
+                                <p:cond delay="0"/>
+                              </p:stCondLst>
+                            </p:cTn>
+                            <p:tgtEl>
+                              <p:spTgt spid="406"/>
+                            </p:tgtEl>
+                            <p:attrNameLst>
+                              <p:attrName>style.visibility</p:attrName>
+                            </p:attrNameLst>
+                          </p:cBhvr>
+                          <p:to>
+                            <p:strVal val="visible"/>
+                          </p:to>
+                        </p:set>
+                        <p:animEffect transition="in" filter="fade">
+                          <p:cBhvr>
+                            <p:cTn id="101" dur="500"/>
+                            <p:tgtEl>
+                              <p:spTgt spid="406"/>
+                            </p:tgtEl>
+                          </p:cBhvr>
+                        </p:animEffect>
+                      </p:childTnLst>
+                    </p:cTn>
+                  </p:par>
+                  <p:par>
+                    <p:cTn id="7" presetID="10" presetClass="entr" presetSubtype="0" fill="hold" nodeType="afterPrev">
+                      <p:stCondLst>
+                        <p:cond delay="600"/>
+                      </p:stCondLst>
+                      <p:childTnLst>
+                        <p:set>
+                          <p:cBhvr>
+                            <p:cTn id="8" dur="1" fill="hold">
+                              <p:stCondLst>
+                                <p:cond delay="0"/>
+                              </p:stCondLst>
+                            </p:cTn>
+                            <p:tgtEl>
+                              <p:spTgt spid="407"/>
+                            </p:tgtEl>
+                            <p:attrNameLst>
+                              <p:attrName>style.visibility</p:attrName>
+                            </p:attrNameLst>
+                          </p:cBhvr>
+                          <p:to>
+                            <p:strVal val="visible"/>
+                          </p:to>
+                        </p:set>
+                        <p:animEffect transition="in" filter="fade">
+                          <p:cBhvr>
+                            <p:cTn id="102" dur="500"/>
+                            <p:tgtEl>
+                              <p:spTgt spid="407"/>
+                            </p:tgtEl>
+                          </p:cBhvr>
+                        </p:animEffect>
+                      </p:childTnLst>
+                    </p:cTn>
+                  </p:par>
+                  <p:par>
+                    <p:cTn id="9" presetID="10" presetClass="entr" presetSubtype="0" fill="hold" nodeType="afterPrev">
+                      <p:stCondLst>
+                        <p:cond delay="900"/>
+                      </p:stCondLst>
+                      <p:childTnLst>
+                        <p:set>
+                          <p:cBhvr>
+                            <p:cTn id="10" dur="1" fill="hold">
+                              <p:stCondLst>
+                                <p:cond delay="0"/>
+                              </p:stCondLst>
+                            </p:cTn>
+                            <p:tgtEl>
+                              <p:spTgt spid="408"/>
+                            </p:tgtEl>
+                            <p:attrNameLst>
+                              <p:attrName>style.visibility</p:attrName>
+                            </p:attrNameLst>
+                          </p:cBhvr>
+                          <p:to>
+                            <p:strVal val="visible"/>
+                          </p:to>
+                        </p:set>
+                        <p:animEffect transition="in" filter="fade">
+                          <p:cBhvr>
+                            <p:cTn id="103" dur="500"/>
+                            <p:tgtEl>
+                              <p:spTgt spid="408"/>
+                            </p:tgtEl>
+                          </p:cBhvr>
+                        </p:animEffect>
+                      </p:childTnLst>
+                    </p:cTn>
+                  </p:par>
+                  <p:par>
+                    <p:cTn id="11" presetID="10" presetClass="entr" presetSubtype="0" fill="hold" nodeType="afterPrev">
+                      <p:stCondLst>
+                        <p:cond delay="1200"/>
+                      </p:stCondLst>
+                      <p:childTnLst>
+                        <p:set>
+                          <p:cBhvr>
+                            <p:cTn id="12" dur="1" fill="hold">
+                              <p:stCondLst>
+                                <p:cond delay="0"/>
+                              </p:stCondLst>
+                            </p:cTn>
+                            <p:tgtEl>
+                              <p:spTgt spid="409"/>
+                            </p:tgtEl>
+                            <p:attrNameLst>
+                              <p:attrName>style.visibility</p:attrName>
+                            </p:attrNameLst>
+                          </p:cBhvr>
+                          <p:to>
+                            <p:strVal val="visible"/>
+                          </p:to>
+                        </p:set>
+                        <p:animEffect transition="in" filter="fade">
+                          <p:cBhvr>
+                            <p:cTn id="104" dur="500"/>
+                            <p:tgtEl>
+                              <p:spTgt spid="409"/>
+                            </p:tgtEl>
+                          </p:cBhvr>
+                        </p:animEffect>
+                      </p:childTnLst>
+                    </p:cTn>
+                  </p:par>
+                  <p:par>
+                    <p:cTn id="13" presetID="10" presetClass="entr" presetSubtype="0" fill="hold" nodeType="afterPrev">
+                      <p:stCondLst>
+                        <p:cond delay="1500"/>
+                      </p:stCondLst>
+                      <p:childTnLst>
+                        <p:set>
+                          <p:cBhvr>
+                            <p:cTn id="14" dur="1" fill="hold">
+                              <p:stCondLst>
+                                <p:cond delay="0"/>
+                              </p:stCondLst>
+                            </p:cTn>
+                            <p:tgtEl>
+                              <p:spTgt spid="410"/>
+                            </p:tgtEl>
+                            <p:attrNameLst>
+                              <p:attrName>style.visibility</p:attrName>
+                            </p:attrNameLst>
+                          </p:cBhvr>
+                          <p:to>
+                            <p:strVal val="visible"/>
+                          </p:to>
+                        </p:set>
+                        <p:animEffect transition="in" filter="fade">
+                          <p:cBhvr>
+                            <p:cTn id="105" dur="500"/>
+                            <p:tgtEl>
+                              <p:spTgt spid="410"/>
+                            </p:tgtEl>
+                          </p:cBhvr>
+                        </p:animEffect>
+                      </p:childTnLst>
+                    </p:cTn>
+                  </p:par>
+                </p:childTnLst>
+              </p:cTn>
+              <p:prevCondLst>
+                <p:cond evt="onPrev" delay="0">
+                  <p:tgtEl>
+                    <p:sldTgt/>
+                  </p:tgtEl>
+                </p:cond>
+              </p:prevCondLst>
+              <p:nextCondLst>
+                <p:cond evt="onNext" delay="0">
+                  <p:tgtEl>
+                    <p:sldTgt/>
+                  </p:tgtEl>
+                </p:cond>
+              </p:nextCondLst>
+            </p:seq>
+          </p:childTnLst>
+        </p:cTn>
+      </p:par>
+    </p:tnLst>
+  </p:timing>
 </p:sld>
 </file>
 
@@ -34674,6 +36927,214 @@
   <p:clrMapOvr>
     <a:masterClrMapping/>
   </p:clrMapOvr>
+  <p:transition spd="med" advClick="1">
+    <p:fade/>
+  </p:transition>
+  <p:timing>
+    <p:tnLst>
+      <p:par>
+        <p:cTn id="1" dur="indefinite" restart="never" nodeType="tmRoot">
+          <p:childTnLst>
+            <p:seq concurrent="1" nextAc="seek">
+              <p:cTn id="2" dur="indefinite" nodeType="mainSeq">
+                <p:childTnLst>
+                  <p:par>
+                    <p:cTn id="3" presetID="10" presetClass="entr" presetSubtype="0" fill="hold" nodeType="afterPrev">
+                      <p:stCondLst>
+                        <p:cond delay="0"/>
+                      </p:stCondLst>
+                      <p:childTnLst>
+                        <p:set>
+                          <p:cBhvr>
+                            <p:cTn id="4" dur="1" fill="hold">
+                              <p:stCondLst>
+                                <p:cond delay="0"/>
+                              </p:stCondLst>
+                            </p:cTn>
+                            <p:tgtEl>
+                              <p:spTgt spid="106"/>
+                            </p:tgtEl>
+                            <p:attrNameLst>
+                              <p:attrName>style.visibility</p:attrName>
+                            </p:attrNameLst>
+                          </p:cBhvr>
+                          <p:to>
+                            <p:strVal val="visible"/>
+                          </p:to>
+                        </p:set>
+                        <p:animEffect transition="in" filter="fade">
+                          <p:cBhvr>
+                            <p:cTn id="100" dur="500"/>
+                            <p:tgtEl>
+                              <p:spTgt spid="106"/>
+                            </p:tgtEl>
+                          </p:cBhvr>
+                        </p:animEffect>
+                      </p:childTnLst>
+                    </p:cTn>
+                  </p:par>
+                  <p:par>
+                    <p:cTn id="5" presetID="10" presetClass="entr" presetSubtype="0" fill="hold" nodeType="afterPrev">
+                      <p:stCondLst>
+                        <p:cond delay="300"/>
+                      </p:stCondLst>
+                      <p:childTnLst>
+                        <p:set>
+                          <p:cBhvr>
+                            <p:cTn id="6" dur="1" fill="hold">
+                              <p:stCondLst>
+                                <p:cond delay="0"/>
+                              </p:stCondLst>
+                            </p:cTn>
+                            <p:tgtEl>
+                              <p:spTgt spid="107"/>
+                            </p:tgtEl>
+                            <p:attrNameLst>
+                              <p:attrName>style.visibility</p:attrName>
+                            </p:attrNameLst>
+                          </p:cBhvr>
+                          <p:to>
+                            <p:strVal val="visible"/>
+                          </p:to>
+                        </p:set>
+                        <p:animEffect transition="in" filter="fade">
+                          <p:cBhvr>
+                            <p:cTn id="101" dur="500"/>
+                            <p:tgtEl>
+                              <p:spTgt spid="107"/>
+                            </p:tgtEl>
+                          </p:cBhvr>
+                        </p:animEffect>
+                      </p:childTnLst>
+                    </p:cTn>
+                  </p:par>
+                  <p:par>
+                    <p:cTn id="7" presetID="10" presetClass="entr" presetSubtype="0" fill="hold" nodeType="afterPrev">
+                      <p:stCondLst>
+                        <p:cond delay="600"/>
+                      </p:stCondLst>
+                      <p:childTnLst>
+                        <p:set>
+                          <p:cBhvr>
+                            <p:cTn id="8" dur="1" fill="hold">
+                              <p:stCondLst>
+                                <p:cond delay="0"/>
+                              </p:stCondLst>
+                            </p:cTn>
+                            <p:tgtEl>
+                              <p:spTgt spid="108"/>
+                            </p:tgtEl>
+                            <p:attrNameLst>
+                              <p:attrName>style.visibility</p:attrName>
+                            </p:attrNameLst>
+                          </p:cBhvr>
+                          <p:to>
+                            <p:strVal val="visible"/>
+                          </p:to>
+                        </p:set>
+                        <p:animEffect transition="in" filter="fade">
+                          <p:cBhvr>
+                            <p:cTn id="102" dur="500"/>
+                            <p:tgtEl>
+                              <p:spTgt spid="108"/>
+                            </p:tgtEl>
+                          </p:cBhvr>
+                        </p:animEffect>
+                      </p:childTnLst>
+                    </p:cTn>
+                  </p:par>
+                  <p:par>
+                    <p:cTn id="9" presetID="10" presetClass="entr" presetSubtype="0" fill="hold" nodeType="afterPrev">
+                      <p:stCondLst>
+                        <p:cond delay="900"/>
+                      </p:stCondLst>
+                      <p:childTnLst>
+                        <p:set>
+                          <p:cBhvr>
+                            <p:cTn id="10" dur="1" fill="hold">
+                              <p:stCondLst>
+                                <p:cond delay="0"/>
+                              </p:stCondLst>
+                            </p:cTn>
+                            <p:tgtEl>
+                              <p:spTgt spid="109"/>
+                            </p:tgtEl>
+                            <p:attrNameLst>
+                              <p:attrName>style.visibility</p:attrName>
+                            </p:attrNameLst>
+                          </p:cBhvr>
+                          <p:to>
+                            <p:strVal val="visible"/>
+                          </p:to>
+                        </p:set>
+                        <p:animEffect transition="in" filter="fade">
+                          <p:cBhvr>
+                            <p:cTn id="103" dur="500"/>
+                            <p:tgtEl>
+                              <p:spTgt spid="109"/>
+                            </p:tgtEl>
+                          </p:cBhvr>
+                        </p:animEffect>
+                      </p:childTnLst>
+                    </p:cTn>
+                  </p:par>
+                  <p:par>
+                    <p:cTn id="11" presetID="10" presetClass="entr" presetSubtype="0" fill="hold" nodeType="afterPrev">
+                      <p:stCondLst>
+                        <p:cond delay="1200"/>
+                      </p:stCondLst>
+                      <p:childTnLst>
+                        <p:set>
+                          <p:cBhvr>
+                            <p:cTn id="12" dur="1" fill="hold">
+                              <p:stCondLst>
+                                <p:cond delay="0"/>
+                              </p:stCondLst>
+                            </p:cTn>
+                            <p:tgtEl>
+                              <p:spTgt spid="110"/>
+                            </p:tgtEl>
+                            <p:attrNameLst>
+                              <p:attrName>style.visibility</p:attrName>
+                            </p:attrNameLst>
+                          </p:cBhvr>
+                          <p:to>
+                            <p:strVal val="visible"/>
+                          </p:to>
+                        </p:set>
+                        <p:animEffect transition="in" filter="fade">
+                          <p:cBhvr>
+                            <p:cTn id="104" dur="500"/>
+                            <p:tgtEl>
+                              <p:spTgt spid="110"/>
+                            </p:tgtEl>
+                          </p:cBhvr>
+                        </p:animEffect>
+                      </p:childTnLst>
+                    </p:cTn>
+                  </p:par>
+                </p:childTnLst>
+              </p:cTn>
+              <p:prevCondLst>
+                <p:cond evt="onPrev" delay="0">
+                  <p:tgtEl>
+                    <p:sldTgt/>
+                  </p:tgtEl>
+                </p:cond>
+              </p:prevCondLst>
+              <p:nextCondLst>
+                <p:cond evt="onNext" delay="0">
+                  <p:tgtEl>
+                    <p:sldTgt/>
+                  </p:tgtEl>
+                </p:cond>
+              </p:nextCondLst>
+            </p:seq>
+          </p:childTnLst>
+        </p:cTn>
+      </p:par>
+    </p:tnLst>
+  </p:timing>
 </p:sld>
 </file>
 
@@ -35639,6 +38100,249 @@
   <p:clrMapOvr>
     <a:masterClrMapping/>
   </p:clrMapOvr>
+  <p:transition spd="med" advClick="1">
+    <p:wipe dir="l"/>
+  </p:transition>
+  <p:timing>
+    <p:tnLst>
+      <p:par>
+        <p:cTn id="1" dur="indefinite" restart="never" nodeType="tmRoot">
+          <p:childTnLst>
+            <p:seq concurrent="1" nextAc="seek">
+              <p:cTn id="2" dur="indefinite" nodeType="mainSeq">
+                <p:childTnLst>
+                  <p:par>
+                    <p:cTn id="3" presetID="10" presetClass="entr" presetSubtype="0" fill="hold" nodeType="afterPrev">
+                      <p:stCondLst>
+                        <p:cond delay="0"/>
+                      </p:stCondLst>
+                      <p:childTnLst>
+                        <p:set>
+                          <p:cBhvr>
+                            <p:cTn id="4" dur="1" fill="hold">
+                              <p:stCondLst>
+                                <p:cond delay="0"/>
+                              </p:stCondLst>
+                            </p:cTn>
+                            <p:tgtEl>
+                              <p:spTgt spid="429"/>
+                            </p:tgtEl>
+                            <p:attrNameLst>
+                              <p:attrName>style.visibility</p:attrName>
+                            </p:attrNameLst>
+                          </p:cBhvr>
+                          <p:to>
+                            <p:strVal val="visible"/>
+                          </p:to>
+                        </p:set>
+                        <p:animEffect transition="in" filter="fade">
+                          <p:cBhvr>
+                            <p:cTn id="100" dur="500"/>
+                            <p:tgtEl>
+                              <p:spTgt spid="429"/>
+                            </p:tgtEl>
+                          </p:cBhvr>
+                        </p:animEffect>
+                      </p:childTnLst>
+                    </p:cTn>
+                  </p:par>
+                  <p:par>
+                    <p:cTn id="5" presetID="10" presetClass="entr" presetSubtype="0" fill="hold" nodeType="afterPrev">
+                      <p:stCondLst>
+                        <p:cond delay="300"/>
+                      </p:stCondLst>
+                      <p:childTnLst>
+                        <p:set>
+                          <p:cBhvr>
+                            <p:cTn id="6" dur="1" fill="hold">
+                              <p:stCondLst>
+                                <p:cond delay="0"/>
+                              </p:stCondLst>
+                            </p:cTn>
+                            <p:tgtEl>
+                              <p:spTgt spid="430"/>
+                            </p:tgtEl>
+                            <p:attrNameLst>
+                              <p:attrName>style.visibility</p:attrName>
+                            </p:attrNameLst>
+                          </p:cBhvr>
+                          <p:to>
+                            <p:strVal val="visible"/>
+                          </p:to>
+                        </p:set>
+                        <p:animEffect transition="in" filter="fade">
+                          <p:cBhvr>
+                            <p:cTn id="101" dur="500"/>
+                            <p:tgtEl>
+                              <p:spTgt spid="430"/>
+                            </p:tgtEl>
+                          </p:cBhvr>
+                        </p:animEffect>
+                      </p:childTnLst>
+                    </p:cTn>
+                  </p:par>
+                  <p:par>
+                    <p:cTn id="7" presetID="10" presetClass="entr" presetSubtype="0" fill="hold" nodeType="afterPrev">
+                      <p:stCondLst>
+                        <p:cond delay="600"/>
+                      </p:stCondLst>
+                      <p:childTnLst>
+                        <p:set>
+                          <p:cBhvr>
+                            <p:cTn id="8" dur="1" fill="hold">
+                              <p:stCondLst>
+                                <p:cond delay="0"/>
+                              </p:stCondLst>
+                            </p:cTn>
+                            <p:tgtEl>
+                              <p:spTgt spid="431"/>
+                            </p:tgtEl>
+                            <p:attrNameLst>
+                              <p:attrName>style.visibility</p:attrName>
+                            </p:attrNameLst>
+                          </p:cBhvr>
+                          <p:to>
+                            <p:strVal val="visible"/>
+                          </p:to>
+                        </p:set>
+                        <p:animEffect transition="in" filter="fade">
+                          <p:cBhvr>
+                            <p:cTn id="102" dur="500"/>
+                            <p:tgtEl>
+                              <p:spTgt spid="431"/>
+                            </p:tgtEl>
+                          </p:cBhvr>
+                        </p:animEffect>
+                      </p:childTnLst>
+                    </p:cTn>
+                  </p:par>
+                  <p:par>
+                    <p:cTn id="9" presetID="10" presetClass="entr" presetSubtype="0" fill="hold" nodeType="afterPrev">
+                      <p:stCondLst>
+                        <p:cond delay="900"/>
+                      </p:stCondLst>
+                      <p:childTnLst>
+                        <p:set>
+                          <p:cBhvr>
+                            <p:cTn id="10" dur="1" fill="hold">
+                              <p:stCondLst>
+                                <p:cond delay="0"/>
+                              </p:stCondLst>
+                            </p:cTn>
+                            <p:tgtEl>
+                              <p:spTgt spid="432"/>
+                            </p:tgtEl>
+                            <p:attrNameLst>
+                              <p:attrName>style.visibility</p:attrName>
+                            </p:attrNameLst>
+                          </p:cBhvr>
+                          <p:to>
+                            <p:strVal val="visible"/>
+                          </p:to>
+                        </p:set>
+                        <p:animEffect transition="in" filter="fade">
+                          <p:cBhvr>
+                            <p:cTn id="103" dur="500"/>
+                            <p:tgtEl>
+                              <p:spTgt spid="432"/>
+                            </p:tgtEl>
+                          </p:cBhvr>
+                        </p:animEffect>
+                      </p:childTnLst>
+                    </p:cTn>
+                  </p:par>
+                  <p:par>
+                    <p:cTn id="11" presetID="10" presetClass="entr" presetSubtype="0" fill="hold" nodeType="afterPrev">
+                      <p:stCondLst>
+                        <p:cond delay="1200"/>
+                      </p:stCondLst>
+                      <p:childTnLst>
+                        <p:set>
+                          <p:cBhvr>
+                            <p:cTn id="12" dur="1" fill="hold">
+                              <p:stCondLst>
+                                <p:cond delay="0"/>
+                              </p:stCondLst>
+                            </p:cTn>
+                            <p:tgtEl>
+                              <p:spTgt spid="433"/>
+                            </p:tgtEl>
+                            <p:attrNameLst>
+                              <p:attrName>style.visibility</p:attrName>
+                            </p:attrNameLst>
+                          </p:cBhvr>
+                          <p:to>
+                            <p:strVal val="visible"/>
+                          </p:to>
+                        </p:set>
+                        <p:animEffect transition="in" filter="fade">
+                          <p:cBhvr>
+                            <p:cTn id="104" dur="500"/>
+                            <p:tgtEl>
+                              <p:spTgt spid="433"/>
+                            </p:tgtEl>
+                          </p:cBhvr>
+                        </p:animEffect>
+                      </p:childTnLst>
+                    </p:cTn>
+                  </p:par>
+                  <p:par>
+                    <p:cTn id="13" presetID="10" presetClass="entr" presetSubtype="0" fill="hold" nodeType="afterPrev">
+                      <p:stCondLst>
+                        <p:cond delay="1500"/>
+                      </p:stCondLst>
+                      <p:childTnLst>
+                        <p:set>
+                          <p:cBhvr>
+                            <p:cTn id="14" dur="1" fill="hold">
+                              <p:stCondLst>
+                                <p:cond delay="0"/>
+                              </p:stCondLst>
+                            </p:cTn>
+                            <p:tgtEl>
+                              <p:spTgt spid="434"/>
+                            </p:tgtEl>
+                            <p:attrNameLst>
+                              <p:attrName>style.visibility</p:attrName>
+                            </p:attrNameLst>
+                          </p:cBhvr>
+                          <p:to>
+                            <p:strVal val="visible"/>
+                          </p:to>
+                        </p:set>
+                        <p:animEffect transition="in" filter="fade">
+                          <p:cBhvr>
+                            <p:cTn id="105" dur="500"/>
+                            <p:tgtEl>
+                              <p:spTgt spid="434"/>
+                            </p:tgtEl>
+                          </p:cBhvr>
+                        </p:animEffect>
+                      </p:childTnLst>
+                    </p:cTn>
+                  </p:par>
+                </p:childTnLst>
+              </p:cTn>
+              <p:prevCondLst>
+                <p:cond evt="onPrev" delay="0">
+                  <p:tgtEl>
+                    <p:sldTgt/>
+                  </p:tgtEl>
+                </p:cond>
+              </p:prevCondLst>
+              <p:nextCondLst>
+                <p:cond evt="onNext" delay="0">
+                  <p:tgtEl>
+                    <p:sldTgt/>
+                  </p:tgtEl>
+                </p:cond>
+              </p:nextCondLst>
+            </p:seq>
+          </p:childTnLst>
+        </p:cTn>
+      </p:par>
+    </p:tnLst>
+  </p:timing>
 </p:sld>
 </file>
 
@@ -36599,6 +39303,249 @@
   <p:clrMapOvr>
     <a:masterClrMapping/>
   </p:clrMapOvr>
+  <p:transition spd="med" advClick="1">
+    <p:wipe dir="l"/>
+  </p:transition>
+  <p:timing>
+    <p:tnLst>
+      <p:par>
+        <p:cTn id="1" dur="indefinite" restart="never" nodeType="tmRoot">
+          <p:childTnLst>
+            <p:seq concurrent="1" nextAc="seek">
+              <p:cTn id="2" dur="indefinite" nodeType="mainSeq">
+                <p:childTnLst>
+                  <p:par>
+                    <p:cTn id="3" presetID="10" presetClass="entr" presetSubtype="0" fill="hold" nodeType="afterPrev">
+                      <p:stCondLst>
+                        <p:cond delay="0"/>
+                      </p:stCondLst>
+                      <p:childTnLst>
+                        <p:set>
+                          <p:cBhvr>
+                            <p:cTn id="4" dur="1" fill="hold">
+                              <p:stCondLst>
+                                <p:cond delay="0"/>
+                              </p:stCondLst>
+                            </p:cTn>
+                            <p:tgtEl>
+                              <p:spTgt spid="442"/>
+                            </p:tgtEl>
+                            <p:attrNameLst>
+                              <p:attrName>style.visibility</p:attrName>
+                            </p:attrNameLst>
+                          </p:cBhvr>
+                          <p:to>
+                            <p:strVal val="visible"/>
+                          </p:to>
+                        </p:set>
+                        <p:animEffect transition="in" filter="fade">
+                          <p:cBhvr>
+                            <p:cTn id="100" dur="500"/>
+                            <p:tgtEl>
+                              <p:spTgt spid="442"/>
+                            </p:tgtEl>
+                          </p:cBhvr>
+                        </p:animEffect>
+                      </p:childTnLst>
+                    </p:cTn>
+                  </p:par>
+                  <p:par>
+                    <p:cTn id="5" presetID="10" presetClass="entr" presetSubtype="0" fill="hold" nodeType="afterPrev">
+                      <p:stCondLst>
+                        <p:cond delay="300"/>
+                      </p:stCondLst>
+                      <p:childTnLst>
+                        <p:set>
+                          <p:cBhvr>
+                            <p:cTn id="6" dur="1" fill="hold">
+                              <p:stCondLst>
+                                <p:cond delay="0"/>
+                              </p:stCondLst>
+                            </p:cTn>
+                            <p:tgtEl>
+                              <p:spTgt spid="443"/>
+                            </p:tgtEl>
+                            <p:attrNameLst>
+                              <p:attrName>style.visibility</p:attrName>
+                            </p:attrNameLst>
+                          </p:cBhvr>
+                          <p:to>
+                            <p:strVal val="visible"/>
+                          </p:to>
+                        </p:set>
+                        <p:animEffect transition="in" filter="fade">
+                          <p:cBhvr>
+                            <p:cTn id="101" dur="500"/>
+                            <p:tgtEl>
+                              <p:spTgt spid="443"/>
+                            </p:tgtEl>
+                          </p:cBhvr>
+                        </p:animEffect>
+                      </p:childTnLst>
+                    </p:cTn>
+                  </p:par>
+                  <p:par>
+                    <p:cTn id="7" presetID="10" presetClass="entr" presetSubtype="0" fill="hold" nodeType="afterPrev">
+                      <p:stCondLst>
+                        <p:cond delay="600"/>
+                      </p:stCondLst>
+                      <p:childTnLst>
+                        <p:set>
+                          <p:cBhvr>
+                            <p:cTn id="8" dur="1" fill="hold">
+                              <p:stCondLst>
+                                <p:cond delay="0"/>
+                              </p:stCondLst>
+                            </p:cTn>
+                            <p:tgtEl>
+                              <p:spTgt spid="444"/>
+                            </p:tgtEl>
+                            <p:attrNameLst>
+                              <p:attrName>style.visibility</p:attrName>
+                            </p:attrNameLst>
+                          </p:cBhvr>
+                          <p:to>
+                            <p:strVal val="visible"/>
+                          </p:to>
+                        </p:set>
+                        <p:animEffect transition="in" filter="fade">
+                          <p:cBhvr>
+                            <p:cTn id="102" dur="500"/>
+                            <p:tgtEl>
+                              <p:spTgt spid="444"/>
+                            </p:tgtEl>
+                          </p:cBhvr>
+                        </p:animEffect>
+                      </p:childTnLst>
+                    </p:cTn>
+                  </p:par>
+                  <p:par>
+                    <p:cTn id="9" presetID="10" presetClass="entr" presetSubtype="0" fill="hold" nodeType="afterPrev">
+                      <p:stCondLst>
+                        <p:cond delay="900"/>
+                      </p:stCondLst>
+                      <p:childTnLst>
+                        <p:set>
+                          <p:cBhvr>
+                            <p:cTn id="10" dur="1" fill="hold">
+                              <p:stCondLst>
+                                <p:cond delay="0"/>
+                              </p:stCondLst>
+                            </p:cTn>
+                            <p:tgtEl>
+                              <p:spTgt spid="445"/>
+                            </p:tgtEl>
+                            <p:attrNameLst>
+                              <p:attrName>style.visibility</p:attrName>
+                            </p:attrNameLst>
+                          </p:cBhvr>
+                          <p:to>
+                            <p:strVal val="visible"/>
+                          </p:to>
+                        </p:set>
+                        <p:animEffect transition="in" filter="fade">
+                          <p:cBhvr>
+                            <p:cTn id="103" dur="500"/>
+                            <p:tgtEl>
+                              <p:spTgt spid="445"/>
+                            </p:tgtEl>
+                          </p:cBhvr>
+                        </p:animEffect>
+                      </p:childTnLst>
+                    </p:cTn>
+                  </p:par>
+                  <p:par>
+                    <p:cTn id="11" presetID="10" presetClass="entr" presetSubtype="0" fill="hold" nodeType="afterPrev">
+                      <p:stCondLst>
+                        <p:cond delay="1200"/>
+                      </p:stCondLst>
+                      <p:childTnLst>
+                        <p:set>
+                          <p:cBhvr>
+                            <p:cTn id="12" dur="1" fill="hold">
+                              <p:stCondLst>
+                                <p:cond delay="0"/>
+                              </p:stCondLst>
+                            </p:cTn>
+                            <p:tgtEl>
+                              <p:spTgt spid="446"/>
+                            </p:tgtEl>
+                            <p:attrNameLst>
+                              <p:attrName>style.visibility</p:attrName>
+                            </p:attrNameLst>
+                          </p:cBhvr>
+                          <p:to>
+                            <p:strVal val="visible"/>
+                          </p:to>
+                        </p:set>
+                        <p:animEffect transition="in" filter="fade">
+                          <p:cBhvr>
+                            <p:cTn id="104" dur="500"/>
+                            <p:tgtEl>
+                              <p:spTgt spid="446"/>
+                            </p:tgtEl>
+                          </p:cBhvr>
+                        </p:animEffect>
+                      </p:childTnLst>
+                    </p:cTn>
+                  </p:par>
+                  <p:par>
+                    <p:cTn id="13" presetID="10" presetClass="entr" presetSubtype="0" fill="hold" nodeType="afterPrev">
+                      <p:stCondLst>
+                        <p:cond delay="1500"/>
+                      </p:stCondLst>
+                      <p:childTnLst>
+                        <p:set>
+                          <p:cBhvr>
+                            <p:cTn id="14" dur="1" fill="hold">
+                              <p:stCondLst>
+                                <p:cond delay="0"/>
+                              </p:stCondLst>
+                            </p:cTn>
+                            <p:tgtEl>
+                              <p:spTgt spid="447"/>
+                            </p:tgtEl>
+                            <p:attrNameLst>
+                              <p:attrName>style.visibility</p:attrName>
+                            </p:attrNameLst>
+                          </p:cBhvr>
+                          <p:to>
+                            <p:strVal val="visible"/>
+                          </p:to>
+                        </p:set>
+                        <p:animEffect transition="in" filter="fade">
+                          <p:cBhvr>
+                            <p:cTn id="105" dur="500"/>
+                            <p:tgtEl>
+                              <p:spTgt spid="447"/>
+                            </p:tgtEl>
+                          </p:cBhvr>
+                        </p:animEffect>
+                      </p:childTnLst>
+                    </p:cTn>
+                  </p:par>
+                </p:childTnLst>
+              </p:cTn>
+              <p:prevCondLst>
+                <p:cond evt="onPrev" delay="0">
+                  <p:tgtEl>
+                    <p:sldTgt/>
+                  </p:tgtEl>
+                </p:cond>
+              </p:prevCondLst>
+              <p:nextCondLst>
+                <p:cond evt="onNext" delay="0">
+                  <p:tgtEl>
+                    <p:sldTgt/>
+                  </p:tgtEl>
+                </p:cond>
+              </p:nextCondLst>
+            </p:seq>
+          </p:childTnLst>
+        </p:cTn>
+      </p:par>
+    </p:tnLst>
+  </p:timing>
 </p:sld>
 </file>
 
@@ -37150,6 +40097,249 @@
   <p:clrMapOvr>
     <a:masterClrMapping/>
   </p:clrMapOvr>
+  <p:transition spd="med" advClick="1">
+    <p:wipe dir="l"/>
+  </p:transition>
+  <p:timing>
+    <p:tnLst>
+      <p:par>
+        <p:cTn id="1" dur="indefinite" restart="never" nodeType="tmRoot">
+          <p:childTnLst>
+            <p:seq concurrent="1" nextAc="seek">
+              <p:cTn id="2" dur="indefinite" nodeType="mainSeq">
+                <p:childTnLst>
+                  <p:par>
+                    <p:cTn id="3" presetID="10" presetClass="entr" presetSubtype="0" fill="hold" nodeType="afterPrev">
+                      <p:stCondLst>
+                        <p:cond delay="0"/>
+                      </p:stCondLst>
+                      <p:childTnLst>
+                        <p:set>
+                          <p:cBhvr>
+                            <p:cTn id="4" dur="1" fill="hold">
+                              <p:stCondLst>
+                                <p:cond delay="0"/>
+                              </p:stCondLst>
+                            </p:cTn>
+                            <p:tgtEl>
+                              <p:spTgt spid="455"/>
+                            </p:tgtEl>
+                            <p:attrNameLst>
+                              <p:attrName>style.visibility</p:attrName>
+                            </p:attrNameLst>
+                          </p:cBhvr>
+                          <p:to>
+                            <p:strVal val="visible"/>
+                          </p:to>
+                        </p:set>
+                        <p:animEffect transition="in" filter="fade">
+                          <p:cBhvr>
+                            <p:cTn id="100" dur="500"/>
+                            <p:tgtEl>
+                              <p:spTgt spid="455"/>
+                            </p:tgtEl>
+                          </p:cBhvr>
+                        </p:animEffect>
+                      </p:childTnLst>
+                    </p:cTn>
+                  </p:par>
+                  <p:par>
+                    <p:cTn id="5" presetID="10" presetClass="entr" presetSubtype="0" fill="hold" nodeType="afterPrev">
+                      <p:stCondLst>
+                        <p:cond delay="300"/>
+                      </p:stCondLst>
+                      <p:childTnLst>
+                        <p:set>
+                          <p:cBhvr>
+                            <p:cTn id="6" dur="1" fill="hold">
+                              <p:stCondLst>
+                                <p:cond delay="0"/>
+                              </p:stCondLst>
+                            </p:cTn>
+                            <p:tgtEl>
+                              <p:spTgt spid="456"/>
+                            </p:tgtEl>
+                            <p:attrNameLst>
+                              <p:attrName>style.visibility</p:attrName>
+                            </p:attrNameLst>
+                          </p:cBhvr>
+                          <p:to>
+                            <p:strVal val="visible"/>
+                          </p:to>
+                        </p:set>
+                        <p:animEffect transition="in" filter="fade">
+                          <p:cBhvr>
+                            <p:cTn id="101" dur="500"/>
+                            <p:tgtEl>
+                              <p:spTgt spid="456"/>
+                            </p:tgtEl>
+                          </p:cBhvr>
+                        </p:animEffect>
+                      </p:childTnLst>
+                    </p:cTn>
+                  </p:par>
+                  <p:par>
+                    <p:cTn id="7" presetID="10" presetClass="entr" presetSubtype="0" fill="hold" nodeType="afterPrev">
+                      <p:stCondLst>
+                        <p:cond delay="600"/>
+                      </p:stCondLst>
+                      <p:childTnLst>
+                        <p:set>
+                          <p:cBhvr>
+                            <p:cTn id="8" dur="1" fill="hold">
+                              <p:stCondLst>
+                                <p:cond delay="0"/>
+                              </p:stCondLst>
+                            </p:cTn>
+                            <p:tgtEl>
+                              <p:spTgt spid="457"/>
+                            </p:tgtEl>
+                            <p:attrNameLst>
+                              <p:attrName>style.visibility</p:attrName>
+                            </p:attrNameLst>
+                          </p:cBhvr>
+                          <p:to>
+                            <p:strVal val="visible"/>
+                          </p:to>
+                        </p:set>
+                        <p:animEffect transition="in" filter="fade">
+                          <p:cBhvr>
+                            <p:cTn id="102" dur="500"/>
+                            <p:tgtEl>
+                              <p:spTgt spid="457"/>
+                            </p:tgtEl>
+                          </p:cBhvr>
+                        </p:animEffect>
+                      </p:childTnLst>
+                    </p:cTn>
+                  </p:par>
+                  <p:par>
+                    <p:cTn id="9" presetID="10" presetClass="entr" presetSubtype="0" fill="hold" nodeType="afterPrev">
+                      <p:stCondLst>
+                        <p:cond delay="900"/>
+                      </p:stCondLst>
+                      <p:childTnLst>
+                        <p:set>
+                          <p:cBhvr>
+                            <p:cTn id="10" dur="1" fill="hold">
+                              <p:stCondLst>
+                                <p:cond delay="0"/>
+                              </p:stCondLst>
+                            </p:cTn>
+                            <p:tgtEl>
+                              <p:spTgt spid="458"/>
+                            </p:tgtEl>
+                            <p:attrNameLst>
+                              <p:attrName>style.visibility</p:attrName>
+                            </p:attrNameLst>
+                          </p:cBhvr>
+                          <p:to>
+                            <p:strVal val="visible"/>
+                          </p:to>
+                        </p:set>
+                        <p:animEffect transition="in" filter="fade">
+                          <p:cBhvr>
+                            <p:cTn id="103" dur="500"/>
+                            <p:tgtEl>
+                              <p:spTgt spid="458"/>
+                            </p:tgtEl>
+                          </p:cBhvr>
+                        </p:animEffect>
+                      </p:childTnLst>
+                    </p:cTn>
+                  </p:par>
+                  <p:par>
+                    <p:cTn id="11" presetID="10" presetClass="entr" presetSubtype="0" fill="hold" nodeType="afterPrev">
+                      <p:stCondLst>
+                        <p:cond delay="1200"/>
+                      </p:stCondLst>
+                      <p:childTnLst>
+                        <p:set>
+                          <p:cBhvr>
+                            <p:cTn id="12" dur="1" fill="hold">
+                              <p:stCondLst>
+                                <p:cond delay="0"/>
+                              </p:stCondLst>
+                            </p:cTn>
+                            <p:tgtEl>
+                              <p:spTgt spid="459"/>
+                            </p:tgtEl>
+                            <p:attrNameLst>
+                              <p:attrName>style.visibility</p:attrName>
+                            </p:attrNameLst>
+                          </p:cBhvr>
+                          <p:to>
+                            <p:strVal val="visible"/>
+                          </p:to>
+                        </p:set>
+                        <p:animEffect transition="in" filter="fade">
+                          <p:cBhvr>
+                            <p:cTn id="104" dur="500"/>
+                            <p:tgtEl>
+                              <p:spTgt spid="459"/>
+                            </p:tgtEl>
+                          </p:cBhvr>
+                        </p:animEffect>
+                      </p:childTnLst>
+                    </p:cTn>
+                  </p:par>
+                  <p:par>
+                    <p:cTn id="13" presetID="10" presetClass="entr" presetSubtype="0" fill="hold" nodeType="afterPrev">
+                      <p:stCondLst>
+                        <p:cond delay="1500"/>
+                      </p:stCondLst>
+                      <p:childTnLst>
+                        <p:set>
+                          <p:cBhvr>
+                            <p:cTn id="14" dur="1" fill="hold">
+                              <p:stCondLst>
+                                <p:cond delay="0"/>
+                              </p:stCondLst>
+                            </p:cTn>
+                            <p:tgtEl>
+                              <p:spTgt spid="460"/>
+                            </p:tgtEl>
+                            <p:attrNameLst>
+                              <p:attrName>style.visibility</p:attrName>
+                            </p:attrNameLst>
+                          </p:cBhvr>
+                          <p:to>
+                            <p:strVal val="visible"/>
+                          </p:to>
+                        </p:set>
+                        <p:animEffect transition="in" filter="fade">
+                          <p:cBhvr>
+                            <p:cTn id="105" dur="500"/>
+                            <p:tgtEl>
+                              <p:spTgt spid="460"/>
+                            </p:tgtEl>
+                          </p:cBhvr>
+                        </p:animEffect>
+                      </p:childTnLst>
+                    </p:cTn>
+                  </p:par>
+                </p:childTnLst>
+              </p:cTn>
+              <p:prevCondLst>
+                <p:cond evt="onPrev" delay="0">
+                  <p:tgtEl>
+                    <p:sldTgt/>
+                  </p:tgtEl>
+                </p:cond>
+              </p:prevCondLst>
+              <p:nextCondLst>
+                <p:cond evt="onNext" delay="0">
+                  <p:tgtEl>
+                    <p:sldTgt/>
+                  </p:tgtEl>
+                </p:cond>
+              </p:nextCondLst>
+            </p:seq>
+          </p:childTnLst>
+        </p:cTn>
+      </p:par>
+    </p:tnLst>
+  </p:timing>
 </p:sld>
 </file>
 
@@ -37342,6 +40532,179 @@
   <p:clrMapOvr>
     <a:masterClrMapping/>
   </p:clrMapOvr>
+  <p:transition spd="med" advClick="1">
+    <p:fade/>
+  </p:transition>
+  <p:timing>
+    <p:tnLst>
+      <p:par>
+        <p:cTn id="1" dur="indefinite" restart="never" nodeType="tmRoot">
+          <p:childTnLst>
+            <p:seq concurrent="1" nextAc="seek">
+              <p:cTn id="2" dur="indefinite" nodeType="mainSeq">
+                <p:childTnLst>
+                  <p:par>
+                    <p:cTn id="3" presetID="10" presetClass="entr" presetSubtype="0" fill="hold" nodeType="afterPrev">
+                      <p:stCondLst>
+                        <p:cond delay="0"/>
+                      </p:stCondLst>
+                      <p:childTnLst>
+                        <p:set>
+                          <p:cBhvr>
+                            <p:cTn id="4" dur="1" fill="hold">
+                              <p:stCondLst>
+                                <p:cond delay="0"/>
+                              </p:stCondLst>
+                            </p:cTn>
+                            <p:tgtEl>
+                              <p:spTgt spid="468"/>
+                            </p:tgtEl>
+                            <p:attrNameLst>
+                              <p:attrName>style.visibility</p:attrName>
+                            </p:attrNameLst>
+                          </p:cBhvr>
+                          <p:to>
+                            <p:strVal val="visible"/>
+                          </p:to>
+                        </p:set>
+                        <p:animEffect transition="in" filter="fade">
+                          <p:cBhvr>
+                            <p:cTn id="100" dur="500"/>
+                            <p:tgtEl>
+                              <p:spTgt spid="468"/>
+                            </p:tgtEl>
+                          </p:cBhvr>
+                        </p:animEffect>
+                      </p:childTnLst>
+                    </p:cTn>
+                  </p:par>
+                  <p:par>
+                    <p:cTn id="5" presetID="10" presetClass="entr" presetSubtype="0" fill="hold" nodeType="afterPrev">
+                      <p:stCondLst>
+                        <p:cond delay="300"/>
+                      </p:stCondLst>
+                      <p:childTnLst>
+                        <p:set>
+                          <p:cBhvr>
+                            <p:cTn id="6" dur="1" fill="hold">
+                              <p:stCondLst>
+                                <p:cond delay="0"/>
+                              </p:stCondLst>
+                            </p:cTn>
+                            <p:tgtEl>
+                              <p:spTgt spid="469"/>
+                            </p:tgtEl>
+                            <p:attrNameLst>
+                              <p:attrName>style.visibility</p:attrName>
+                            </p:attrNameLst>
+                          </p:cBhvr>
+                          <p:to>
+                            <p:strVal val="visible"/>
+                          </p:to>
+                        </p:set>
+                        <p:animEffect transition="in" filter="fade">
+                          <p:cBhvr>
+                            <p:cTn id="101" dur="500"/>
+                            <p:tgtEl>
+                              <p:spTgt spid="469"/>
+                            </p:tgtEl>
+                          </p:cBhvr>
+                        </p:animEffect>
+                      </p:childTnLst>
+                    </p:cTn>
+                  </p:par>
+                  <p:par>
+                    <p:cTn id="7" presetID="10" presetClass="entr" presetSubtype="0" fill="hold" nodeType="afterPrev">
+                      <p:stCondLst>
+                        <p:cond delay="600"/>
+                      </p:stCondLst>
+                      <p:childTnLst>
+                        <p:set>
+                          <p:cBhvr>
+                            <p:cTn id="8" dur="1" fill="hold">
+                              <p:stCondLst>
+                                <p:cond delay="0"/>
+                              </p:stCondLst>
+                            </p:cTn>
+                            <p:tgtEl>
+                              <p:spTgt spid="470"/>
+                            </p:tgtEl>
+                            <p:attrNameLst>
+                              <p:attrName>style.visibility</p:attrName>
+                            </p:attrNameLst>
+                          </p:cBhvr>
+                          <p:to>
+                            <p:strVal val="visible"/>
+                          </p:to>
+                        </p:set>
+                        <p:animEffect transition="in" filter="fade">
+                          <p:cBhvr>
+                            <p:cTn id="102" dur="500"/>
+                            <p:tgtEl>
+                              <p:spTgt spid="470"/>
+                            </p:tgtEl>
+                          </p:cBhvr>
+                        </p:animEffect>
+                      </p:childTnLst>
+                    </p:cTn>
+                  </p:par>
+                  <p:par>
+                    <p:cTn id="9" presetID="10" presetClass="entr" presetSubtype="0" fill="hold" nodeType="afterPrev">
+                      <p:stCondLst>
+                        <p:cond delay="900"/>
+                      </p:stCondLst>
+                      <p:childTnLst>
+                        <p:set>
+                          <p:cBhvr>
+                            <p:cTn id="10" dur="1" fill="hold">
+                              <p:stCondLst>
+                                <p:cond delay="0"/>
+                              </p:stCondLst>
+                            </p:cTn>
+                            <p:tgtEl>
+                              <p:spTgt spid="471"/>
+                            </p:tgtEl>
+                            <p:attrNameLst>
+                              <p:attrName>style.visibility</p:attrName>
+                            </p:attrNameLst>
+                          </p:cBhvr>
+                          <p:to>
+                            <p:strVal val="visible"/>
+                          </p:to>
+                        </p:set>
+                        <p:animEffect transition="in" filter="fade">
+                          <p:cBhvr>
+                            <p:cTn id="103" dur="500"/>
+                            <p:tgtEl>
+                              <p:spTgt spid="471"/>
+                            </p:tgtEl>
+                          </p:cBhvr>
+                        </p:animEffect>
+                      </p:childTnLst>
+                    </p:cTn>
+                  </p:par>
+                </p:childTnLst>
+              </p:cTn>
+              <p:prevCondLst>
+                <p:cond evt="onPrev" delay="0">
+                  <p:tgtEl>
+                    <p:sldTgt/>
+                  </p:tgtEl>
+                </p:cond>
+              </p:prevCondLst>
+              <p:nextCondLst>
+                <p:cond evt="onNext" delay="0">
+                  <p:tgtEl>
+                    <p:sldTgt/>
+                  </p:tgtEl>
+                </p:cond>
+              </p:nextCondLst>
+            </p:seq>
+          </p:childTnLst>
+        </p:cTn>
+      </p:par>
+    </p:tnLst>
+  </p:timing>
 </p:sld>
 </file>
 
@@ -37619,6 +40982,214 @@
   <p:clrMapOvr>
     <a:masterClrMapping/>
   </p:clrMapOvr>
+  <p:transition spd="med" advClick="1">
+    <p:fade/>
+  </p:transition>
+  <p:timing>
+    <p:tnLst>
+      <p:par>
+        <p:cTn id="1" dur="indefinite" restart="never" nodeType="tmRoot">
+          <p:childTnLst>
+            <p:seq concurrent="1" nextAc="seek">
+              <p:cTn id="2" dur="indefinite" nodeType="mainSeq">
+                <p:childTnLst>
+                  <p:par>
+                    <p:cTn id="3" presetID="10" presetClass="entr" presetSubtype="0" fill="hold" nodeType="afterPrev">
+                      <p:stCondLst>
+                        <p:cond delay="0"/>
+                      </p:stCondLst>
+                      <p:childTnLst>
+                        <p:set>
+                          <p:cBhvr>
+                            <p:cTn id="4" dur="1" fill="hold">
+                              <p:stCondLst>
+                                <p:cond delay="0"/>
+                              </p:stCondLst>
+                            </p:cTn>
+                            <p:tgtEl>
+                              <p:spTgt spid="115"/>
+                            </p:tgtEl>
+                            <p:attrNameLst>
+                              <p:attrName>style.visibility</p:attrName>
+                            </p:attrNameLst>
+                          </p:cBhvr>
+                          <p:to>
+                            <p:strVal val="visible"/>
+                          </p:to>
+                        </p:set>
+                        <p:animEffect transition="in" filter="fade">
+                          <p:cBhvr>
+                            <p:cTn id="100" dur="500"/>
+                            <p:tgtEl>
+                              <p:spTgt spid="115"/>
+                            </p:tgtEl>
+                          </p:cBhvr>
+                        </p:animEffect>
+                      </p:childTnLst>
+                    </p:cTn>
+                  </p:par>
+                  <p:par>
+                    <p:cTn id="5" presetID="10" presetClass="entr" presetSubtype="0" fill="hold" nodeType="afterPrev">
+                      <p:stCondLst>
+                        <p:cond delay="300"/>
+                      </p:stCondLst>
+                      <p:childTnLst>
+                        <p:set>
+                          <p:cBhvr>
+                            <p:cTn id="6" dur="1" fill="hold">
+                              <p:stCondLst>
+                                <p:cond delay="0"/>
+                              </p:stCondLst>
+                            </p:cTn>
+                            <p:tgtEl>
+                              <p:spTgt spid="116"/>
+                            </p:tgtEl>
+                            <p:attrNameLst>
+                              <p:attrName>style.visibility</p:attrName>
+                            </p:attrNameLst>
+                          </p:cBhvr>
+                          <p:to>
+                            <p:strVal val="visible"/>
+                          </p:to>
+                        </p:set>
+                        <p:animEffect transition="in" filter="fade">
+                          <p:cBhvr>
+                            <p:cTn id="101" dur="500"/>
+                            <p:tgtEl>
+                              <p:spTgt spid="116"/>
+                            </p:tgtEl>
+                          </p:cBhvr>
+                        </p:animEffect>
+                      </p:childTnLst>
+                    </p:cTn>
+                  </p:par>
+                  <p:par>
+                    <p:cTn id="7" presetID="10" presetClass="entr" presetSubtype="0" fill="hold" nodeType="afterPrev">
+                      <p:stCondLst>
+                        <p:cond delay="600"/>
+                      </p:stCondLst>
+                      <p:childTnLst>
+                        <p:set>
+                          <p:cBhvr>
+                            <p:cTn id="8" dur="1" fill="hold">
+                              <p:stCondLst>
+                                <p:cond delay="0"/>
+                              </p:stCondLst>
+                            </p:cTn>
+                            <p:tgtEl>
+                              <p:spTgt spid="117"/>
+                            </p:tgtEl>
+                            <p:attrNameLst>
+                              <p:attrName>style.visibility</p:attrName>
+                            </p:attrNameLst>
+                          </p:cBhvr>
+                          <p:to>
+                            <p:strVal val="visible"/>
+                          </p:to>
+                        </p:set>
+                        <p:animEffect transition="in" filter="fade">
+                          <p:cBhvr>
+                            <p:cTn id="102" dur="500"/>
+                            <p:tgtEl>
+                              <p:spTgt spid="117"/>
+                            </p:tgtEl>
+                          </p:cBhvr>
+                        </p:animEffect>
+                      </p:childTnLst>
+                    </p:cTn>
+                  </p:par>
+                  <p:par>
+                    <p:cTn id="9" presetID="10" presetClass="entr" presetSubtype="0" fill="hold" nodeType="afterPrev">
+                      <p:stCondLst>
+                        <p:cond delay="900"/>
+                      </p:stCondLst>
+                      <p:childTnLst>
+                        <p:set>
+                          <p:cBhvr>
+                            <p:cTn id="10" dur="1" fill="hold">
+                              <p:stCondLst>
+                                <p:cond delay="0"/>
+                              </p:stCondLst>
+                            </p:cTn>
+                            <p:tgtEl>
+                              <p:spTgt spid="118"/>
+                            </p:tgtEl>
+                            <p:attrNameLst>
+                              <p:attrName>style.visibility</p:attrName>
+                            </p:attrNameLst>
+                          </p:cBhvr>
+                          <p:to>
+                            <p:strVal val="visible"/>
+                          </p:to>
+                        </p:set>
+                        <p:animEffect transition="in" filter="fade">
+                          <p:cBhvr>
+                            <p:cTn id="103" dur="500"/>
+                            <p:tgtEl>
+                              <p:spTgt spid="118"/>
+                            </p:tgtEl>
+                          </p:cBhvr>
+                        </p:animEffect>
+                      </p:childTnLst>
+                    </p:cTn>
+                  </p:par>
+                  <p:par>
+                    <p:cTn id="11" presetID="10" presetClass="entr" presetSubtype="0" fill="hold" nodeType="afterPrev">
+                      <p:stCondLst>
+                        <p:cond delay="1200"/>
+                      </p:stCondLst>
+                      <p:childTnLst>
+                        <p:set>
+                          <p:cBhvr>
+                            <p:cTn id="12" dur="1" fill="hold">
+                              <p:stCondLst>
+                                <p:cond delay="0"/>
+                              </p:stCondLst>
+                            </p:cTn>
+                            <p:tgtEl>
+                              <p:spTgt spid="3"/>
+                            </p:tgtEl>
+                            <p:attrNameLst>
+                              <p:attrName>style.visibility</p:attrName>
+                            </p:attrNameLst>
+                          </p:cBhvr>
+                          <p:to>
+                            <p:strVal val="visible"/>
+                          </p:to>
+                        </p:set>
+                        <p:animEffect transition="in" filter="fade">
+                          <p:cBhvr>
+                            <p:cTn id="104" dur="500"/>
+                            <p:tgtEl>
+                              <p:spTgt spid="3"/>
+                            </p:tgtEl>
+                          </p:cBhvr>
+                        </p:animEffect>
+                      </p:childTnLst>
+                    </p:cTn>
+                  </p:par>
+                </p:childTnLst>
+              </p:cTn>
+              <p:prevCondLst>
+                <p:cond evt="onPrev" delay="0">
+                  <p:tgtEl>
+                    <p:sldTgt/>
+                  </p:tgtEl>
+                </p:cond>
+              </p:prevCondLst>
+              <p:nextCondLst>
+                <p:cond evt="onNext" delay="0">
+                  <p:tgtEl>
+                    <p:sldTgt/>
+                  </p:tgtEl>
+                </p:cond>
+              </p:nextCondLst>
+            </p:seq>
+          </p:childTnLst>
+        </p:cTn>
+      </p:par>
+    </p:tnLst>
+  </p:timing>
 </p:sld>
 </file>
 
@@ -40007,6 +43578,249 @@
   <p:clrMapOvr>
     <a:masterClrMapping/>
   </p:clrMapOvr>
+  <p:transition spd="med" advClick="1">
+    <p:push dir="l"/>
+  </p:transition>
+  <p:timing>
+    <p:tnLst>
+      <p:par>
+        <p:cTn id="1" dur="indefinite" restart="never" nodeType="tmRoot">
+          <p:childTnLst>
+            <p:seq concurrent="1" nextAc="seek">
+              <p:cTn id="2" dur="indefinite" nodeType="mainSeq">
+                <p:childTnLst>
+                  <p:par>
+                    <p:cTn id="3" presetID="10" presetClass="entr" presetSubtype="0" fill="hold" nodeType="afterPrev">
+                      <p:stCondLst>
+                        <p:cond delay="0"/>
+                      </p:stCondLst>
+                      <p:childTnLst>
+                        <p:set>
+                          <p:cBhvr>
+                            <p:cTn id="4" dur="1" fill="hold">
+                              <p:stCondLst>
+                                <p:cond delay="0"/>
+                              </p:stCondLst>
+                            </p:cTn>
+                            <p:tgtEl>
+                              <p:spTgt spid="123"/>
+                            </p:tgtEl>
+                            <p:attrNameLst>
+                              <p:attrName>style.visibility</p:attrName>
+                            </p:attrNameLst>
+                          </p:cBhvr>
+                          <p:to>
+                            <p:strVal val="visible"/>
+                          </p:to>
+                        </p:set>
+                        <p:animEffect transition="in" filter="fade">
+                          <p:cBhvr>
+                            <p:cTn id="100" dur="500"/>
+                            <p:tgtEl>
+                              <p:spTgt spid="123"/>
+                            </p:tgtEl>
+                          </p:cBhvr>
+                        </p:animEffect>
+                      </p:childTnLst>
+                    </p:cTn>
+                  </p:par>
+                  <p:par>
+                    <p:cTn id="5" presetID="10" presetClass="entr" presetSubtype="0" fill="hold" nodeType="afterPrev">
+                      <p:stCondLst>
+                        <p:cond delay="300"/>
+                      </p:stCondLst>
+                      <p:childTnLst>
+                        <p:set>
+                          <p:cBhvr>
+                            <p:cTn id="6" dur="1" fill="hold">
+                              <p:stCondLst>
+                                <p:cond delay="0"/>
+                              </p:stCondLst>
+                            </p:cTn>
+                            <p:tgtEl>
+                              <p:spTgt spid="124"/>
+                            </p:tgtEl>
+                            <p:attrNameLst>
+                              <p:attrName>style.visibility</p:attrName>
+                            </p:attrNameLst>
+                          </p:cBhvr>
+                          <p:to>
+                            <p:strVal val="visible"/>
+                          </p:to>
+                        </p:set>
+                        <p:animEffect transition="in" filter="fade">
+                          <p:cBhvr>
+                            <p:cTn id="101" dur="500"/>
+                            <p:tgtEl>
+                              <p:spTgt spid="124"/>
+                            </p:tgtEl>
+                          </p:cBhvr>
+                        </p:animEffect>
+                      </p:childTnLst>
+                    </p:cTn>
+                  </p:par>
+                  <p:par>
+                    <p:cTn id="7" presetID="10" presetClass="entr" presetSubtype="0" fill="hold" nodeType="afterPrev">
+                      <p:stCondLst>
+                        <p:cond delay="600"/>
+                      </p:stCondLst>
+                      <p:childTnLst>
+                        <p:set>
+                          <p:cBhvr>
+                            <p:cTn id="8" dur="1" fill="hold">
+                              <p:stCondLst>
+                                <p:cond delay="0"/>
+                              </p:stCondLst>
+                            </p:cTn>
+                            <p:tgtEl>
+                              <p:spTgt spid="58"/>
+                            </p:tgtEl>
+                            <p:attrNameLst>
+                              <p:attrName>style.visibility</p:attrName>
+                            </p:attrNameLst>
+                          </p:cBhvr>
+                          <p:to>
+                            <p:strVal val="visible"/>
+                          </p:to>
+                        </p:set>
+                        <p:animEffect transition="in" filter="fade">
+                          <p:cBhvr>
+                            <p:cTn id="102" dur="500"/>
+                            <p:tgtEl>
+                              <p:spTgt spid="58"/>
+                            </p:tgtEl>
+                          </p:cBhvr>
+                        </p:animEffect>
+                      </p:childTnLst>
+                    </p:cTn>
+                  </p:par>
+                  <p:par>
+                    <p:cTn id="9" presetID="10" presetClass="entr" presetSubtype="0" fill="hold" nodeType="afterPrev">
+                      <p:stCondLst>
+                        <p:cond delay="900"/>
+                      </p:stCondLst>
+                      <p:childTnLst>
+                        <p:set>
+                          <p:cBhvr>
+                            <p:cTn id="10" dur="1" fill="hold">
+                              <p:stCondLst>
+                                <p:cond delay="0"/>
+                              </p:stCondLst>
+                            </p:cTn>
+                            <p:tgtEl>
+                              <p:spTgt spid="59"/>
+                            </p:tgtEl>
+                            <p:attrNameLst>
+                              <p:attrName>style.visibility</p:attrName>
+                            </p:attrNameLst>
+                          </p:cBhvr>
+                          <p:to>
+                            <p:strVal val="visible"/>
+                          </p:to>
+                        </p:set>
+                        <p:animEffect transition="in" filter="fade">
+                          <p:cBhvr>
+                            <p:cTn id="103" dur="500"/>
+                            <p:tgtEl>
+                              <p:spTgt spid="59"/>
+                            </p:tgtEl>
+                          </p:cBhvr>
+                        </p:animEffect>
+                      </p:childTnLst>
+                    </p:cTn>
+                  </p:par>
+                  <p:par>
+                    <p:cTn id="11" presetID="10" presetClass="entr" presetSubtype="0" fill="hold" nodeType="afterPrev">
+                      <p:stCondLst>
+                        <p:cond delay="1200"/>
+                      </p:stCondLst>
+                      <p:childTnLst>
+                        <p:set>
+                          <p:cBhvr>
+                            <p:cTn id="12" dur="1" fill="hold">
+                              <p:stCondLst>
+                                <p:cond delay="0"/>
+                              </p:stCondLst>
+                            </p:cTn>
+                            <p:tgtEl>
+                              <p:spTgt spid="60"/>
+                            </p:tgtEl>
+                            <p:attrNameLst>
+                              <p:attrName>style.visibility</p:attrName>
+                            </p:attrNameLst>
+                          </p:cBhvr>
+                          <p:to>
+                            <p:strVal val="visible"/>
+                          </p:to>
+                        </p:set>
+                        <p:animEffect transition="in" filter="fade">
+                          <p:cBhvr>
+                            <p:cTn id="104" dur="500"/>
+                            <p:tgtEl>
+                              <p:spTgt spid="60"/>
+                            </p:tgtEl>
+                          </p:cBhvr>
+                        </p:animEffect>
+                      </p:childTnLst>
+                    </p:cTn>
+                  </p:par>
+                  <p:par>
+                    <p:cTn id="13" presetID="10" presetClass="entr" presetSubtype="0" fill="hold" nodeType="afterPrev">
+                      <p:stCondLst>
+                        <p:cond delay="1500"/>
+                      </p:stCondLst>
+                      <p:childTnLst>
+                        <p:set>
+                          <p:cBhvr>
+                            <p:cTn id="14" dur="1" fill="hold">
+                              <p:stCondLst>
+                                <p:cond delay="0"/>
+                              </p:stCondLst>
+                            </p:cTn>
+                            <p:tgtEl>
+                              <p:spTgt spid="61"/>
+                            </p:tgtEl>
+                            <p:attrNameLst>
+                              <p:attrName>style.visibility</p:attrName>
+                            </p:attrNameLst>
+                          </p:cBhvr>
+                          <p:to>
+                            <p:strVal val="visible"/>
+                          </p:to>
+                        </p:set>
+                        <p:animEffect transition="in" filter="fade">
+                          <p:cBhvr>
+                            <p:cTn id="105" dur="500"/>
+                            <p:tgtEl>
+                              <p:spTgt spid="61"/>
+                            </p:tgtEl>
+                          </p:cBhvr>
+                        </p:animEffect>
+                      </p:childTnLst>
+                    </p:cTn>
+                  </p:par>
+                </p:childTnLst>
+              </p:cTn>
+              <p:prevCondLst>
+                <p:cond evt="onPrev" delay="0">
+                  <p:tgtEl>
+                    <p:sldTgt/>
+                  </p:tgtEl>
+                </p:cond>
+              </p:prevCondLst>
+              <p:nextCondLst>
+                <p:cond evt="onNext" delay="0">
+                  <p:tgtEl>
+                    <p:sldTgt/>
+                  </p:tgtEl>
+                </p:cond>
+              </p:nextCondLst>
+            </p:seq>
+          </p:childTnLst>
+        </p:cTn>
+      </p:par>
+    </p:tnLst>
+  </p:timing>
 </p:sld>
 </file>
 
@@ -40116,6 +43930,109 @@
   <p:clrMapOvr>
     <a:masterClrMapping/>
   </p:clrMapOvr>
+  <p:transition spd="med" advClick="1">
+    <p:fade/>
+  </p:transition>
+  <p:timing>
+    <p:tnLst>
+      <p:par>
+        <p:cTn id="1" dur="indefinite" restart="never" nodeType="tmRoot">
+          <p:childTnLst>
+            <p:seq concurrent="1" nextAc="seek">
+              <p:cTn id="2" dur="indefinite" nodeType="mainSeq">
+                <p:childTnLst>
+                  <p:par>
+                    <p:cTn id="3" presetID="10" presetClass="entr" presetSubtype="0" fill="hold" nodeType="afterPrev">
+                      <p:stCondLst>
+                        <p:cond delay="0"/>
+                      </p:stCondLst>
+                      <p:childTnLst>
+                        <p:set>
+                          <p:cBhvr>
+                            <p:cTn id="4" dur="1" fill="hold">
+                              <p:stCondLst>
+                                <p:cond delay="0"/>
+                              </p:stCondLst>
+                            </p:cTn>
+                            <p:tgtEl>
+                              <p:spTgt spid="156"/>
+                            </p:tgtEl>
+                            <p:attrNameLst>
+                              <p:attrName>style.visibility</p:attrName>
+                            </p:attrNameLst>
+                          </p:cBhvr>
+                          <p:to>
+                            <p:strVal val="visible"/>
+                          </p:to>
+                        </p:set>
+                        <p:animEffect transition="in" filter="fade">
+                          <p:cBhvr>
+                            <p:cTn id="100" dur="500"/>
+                            <p:tgtEl>
+                              <p:spTgt spid="156"/>
+                            </p:tgtEl>
+                          </p:cBhvr>
+                        </p:animEffect>
+                      </p:childTnLst>
+                    </p:cTn>
+                  </p:par>
+                  <p:par>
+                    <p:cTn id="5" presetID="10" presetClass="entr" presetSubtype="0" fill="hold" nodeType="afterPrev">
+                      <p:stCondLst>
+                        <p:cond delay="300"/>
+                      </p:stCondLst>
+                      <p:childTnLst>
+                        <p:set>
+                          <p:cBhvr>
+                            <p:cTn id="6" dur="1" fill="hold">
+                              <p:stCondLst>
+                                <p:cond delay="0"/>
+                              </p:stCondLst>
+                            </p:cTn>
+                            <p:tgtEl>
+                              <p:spTgt spid="157"/>
+                            </p:tgtEl>
+                            <p:attrNameLst>
+                              <p:attrName>style.visibility</p:attrName>
+                            </p:attrNameLst>
+                          </p:cBhvr>
+                          <p:to>
+                            <p:strVal val="visible"/>
+                          </p:to>
+                        </p:set>
+                        <p:animEffect transition="in" filter="fade">
+                          <p:cBhvr>
+                            <p:cTn id="101" dur="500"/>
+                            <p:tgtEl>
+                              <p:spTgt spid="157"/>
+                            </p:tgtEl>
+                          </p:cBhvr>
+                        </p:animEffect>
+                      </p:childTnLst>
+                    </p:cTn>
+                  </p:par>
+                </p:childTnLst>
+              </p:cTn>
+              <p:prevCondLst>
+                <p:cond evt="onPrev" delay="0">
+                  <p:tgtEl>
+                    <p:sldTgt/>
+                  </p:tgtEl>
+                </p:cond>
+              </p:prevCondLst>
+              <p:nextCondLst>
+                <p:cond evt="onNext" delay="0">
+                  <p:tgtEl>
+                    <p:sldTgt/>
+                  </p:tgtEl>
+                </p:cond>
+              </p:nextCondLst>
+            </p:seq>
+          </p:childTnLst>
+        </p:cTn>
+      </p:par>
+    </p:tnLst>
+  </p:timing>
 </p:sld>
 </file>
 
@@ -42586,6 +46503,249 @@
   <p:clrMapOvr>
     <a:masterClrMapping/>
   </p:clrMapOvr>
+  <p:transition spd="med" advClick="1">
+    <p:fade/>
+  </p:transition>
+  <p:timing>
+    <p:tnLst>
+      <p:par>
+        <p:cTn id="1" dur="indefinite" restart="never" nodeType="tmRoot">
+          <p:childTnLst>
+            <p:seq concurrent="1" nextAc="seek">
+              <p:cTn id="2" dur="indefinite" nodeType="mainSeq">
+                <p:childTnLst>
+                  <p:par>
+                    <p:cTn id="3" presetID="10" presetClass="entr" presetSubtype="0" fill="hold" nodeType="afterPrev">
+                      <p:stCondLst>
+                        <p:cond delay="0"/>
+                      </p:stCondLst>
+                      <p:childTnLst>
+                        <p:set>
+                          <p:cBhvr>
+                            <p:cTn id="4" dur="1" fill="hold">
+                              <p:stCondLst>
+                                <p:cond delay="0"/>
+                              </p:stCondLst>
+                            </p:cTn>
+                            <p:tgtEl>
+                              <p:spTgt spid="162"/>
+                            </p:tgtEl>
+                            <p:attrNameLst>
+                              <p:attrName>style.visibility</p:attrName>
+                            </p:attrNameLst>
+                          </p:cBhvr>
+                          <p:to>
+                            <p:strVal val="visible"/>
+                          </p:to>
+                        </p:set>
+                        <p:animEffect transition="in" filter="fade">
+                          <p:cBhvr>
+                            <p:cTn id="100" dur="500"/>
+                            <p:tgtEl>
+                              <p:spTgt spid="162"/>
+                            </p:tgtEl>
+                          </p:cBhvr>
+                        </p:animEffect>
+                      </p:childTnLst>
+                    </p:cTn>
+                  </p:par>
+                  <p:par>
+                    <p:cTn id="5" presetID="10" presetClass="entr" presetSubtype="0" fill="hold" nodeType="afterPrev">
+                      <p:stCondLst>
+                        <p:cond delay="300"/>
+                      </p:stCondLst>
+                      <p:childTnLst>
+                        <p:set>
+                          <p:cBhvr>
+                            <p:cTn id="6" dur="1" fill="hold">
+                              <p:stCondLst>
+                                <p:cond delay="0"/>
+                              </p:stCondLst>
+                            </p:cTn>
+                            <p:tgtEl>
+                              <p:spTgt spid="163"/>
+                            </p:tgtEl>
+                            <p:attrNameLst>
+                              <p:attrName>style.visibility</p:attrName>
+                            </p:attrNameLst>
+                          </p:cBhvr>
+                          <p:to>
+                            <p:strVal val="visible"/>
+                          </p:to>
+                        </p:set>
+                        <p:animEffect transition="in" filter="fade">
+                          <p:cBhvr>
+                            <p:cTn id="101" dur="500"/>
+                            <p:tgtEl>
+                              <p:spTgt spid="163"/>
+                            </p:tgtEl>
+                          </p:cBhvr>
+                        </p:animEffect>
+                      </p:childTnLst>
+                    </p:cTn>
+                  </p:par>
+                  <p:par>
+                    <p:cTn id="7" presetID="10" presetClass="entr" presetSubtype="0" fill="hold" nodeType="afterPrev">
+                      <p:stCondLst>
+                        <p:cond delay="600"/>
+                      </p:stCondLst>
+                      <p:childTnLst>
+                        <p:set>
+                          <p:cBhvr>
+                            <p:cTn id="8" dur="1" fill="hold">
+                              <p:stCondLst>
+                                <p:cond delay="0"/>
+                              </p:stCondLst>
+                            </p:cTn>
+                            <p:tgtEl>
+                              <p:spTgt spid="164"/>
+                            </p:tgtEl>
+                            <p:attrNameLst>
+                              <p:attrName>style.visibility</p:attrName>
+                            </p:attrNameLst>
+                          </p:cBhvr>
+                          <p:to>
+                            <p:strVal val="visible"/>
+                          </p:to>
+                        </p:set>
+                        <p:animEffect transition="in" filter="fade">
+                          <p:cBhvr>
+                            <p:cTn id="102" dur="500"/>
+                            <p:tgtEl>
+                              <p:spTgt spid="164"/>
+                            </p:tgtEl>
+                          </p:cBhvr>
+                        </p:animEffect>
+                      </p:childTnLst>
+                    </p:cTn>
+                  </p:par>
+                  <p:par>
+                    <p:cTn id="9" presetID="10" presetClass="entr" presetSubtype="0" fill="hold" nodeType="afterPrev">
+                      <p:stCondLst>
+                        <p:cond delay="900"/>
+                      </p:stCondLst>
+                      <p:childTnLst>
+                        <p:set>
+                          <p:cBhvr>
+                            <p:cTn id="10" dur="1" fill="hold">
+                              <p:stCondLst>
+                                <p:cond delay="0"/>
+                              </p:stCondLst>
+                            </p:cTn>
+                            <p:tgtEl>
+                              <p:spTgt spid="57"/>
+                            </p:tgtEl>
+                            <p:attrNameLst>
+                              <p:attrName>style.visibility</p:attrName>
+                            </p:attrNameLst>
+                          </p:cBhvr>
+                          <p:to>
+                            <p:strVal val="visible"/>
+                          </p:to>
+                        </p:set>
+                        <p:animEffect transition="in" filter="fade">
+                          <p:cBhvr>
+                            <p:cTn id="103" dur="500"/>
+                            <p:tgtEl>
+                              <p:spTgt spid="57"/>
+                            </p:tgtEl>
+                          </p:cBhvr>
+                        </p:animEffect>
+                      </p:childTnLst>
+                    </p:cTn>
+                  </p:par>
+                  <p:par>
+                    <p:cTn id="11" presetID="10" presetClass="entr" presetSubtype="0" fill="hold" nodeType="afterPrev">
+                      <p:stCondLst>
+                        <p:cond delay="1200"/>
+                      </p:stCondLst>
+                      <p:childTnLst>
+                        <p:set>
+                          <p:cBhvr>
+                            <p:cTn id="12" dur="1" fill="hold">
+                              <p:stCondLst>
+                                <p:cond delay="0"/>
+                              </p:stCondLst>
+                            </p:cTn>
+                            <p:tgtEl>
+                              <p:spTgt spid="58"/>
+                            </p:tgtEl>
+                            <p:attrNameLst>
+                              <p:attrName>style.visibility</p:attrName>
+                            </p:attrNameLst>
+                          </p:cBhvr>
+                          <p:to>
+                            <p:strVal val="visible"/>
+                          </p:to>
+                        </p:set>
+                        <p:animEffect transition="in" filter="fade">
+                          <p:cBhvr>
+                            <p:cTn id="104" dur="500"/>
+                            <p:tgtEl>
+                              <p:spTgt spid="58"/>
+                            </p:tgtEl>
+                          </p:cBhvr>
+                        </p:animEffect>
+                      </p:childTnLst>
+                    </p:cTn>
+                  </p:par>
+                  <p:par>
+                    <p:cTn id="13" presetID="10" presetClass="entr" presetSubtype="0" fill="hold" nodeType="afterPrev">
+                      <p:stCondLst>
+                        <p:cond delay="1500"/>
+                      </p:stCondLst>
+                      <p:childTnLst>
+                        <p:set>
+                          <p:cBhvr>
+                            <p:cTn id="14" dur="1" fill="hold">
+                              <p:stCondLst>
+                                <p:cond delay="0"/>
+                              </p:stCondLst>
+                            </p:cTn>
+                            <p:tgtEl>
+                              <p:spTgt spid="59"/>
+                            </p:tgtEl>
+                            <p:attrNameLst>
+                              <p:attrName>style.visibility</p:attrName>
+                            </p:attrNameLst>
+                          </p:cBhvr>
+                          <p:to>
+                            <p:strVal val="visible"/>
+                          </p:to>
+                        </p:set>
+                        <p:animEffect transition="in" filter="fade">
+                          <p:cBhvr>
+                            <p:cTn id="105" dur="500"/>
+                            <p:tgtEl>
+                              <p:spTgt spid="59"/>
+                            </p:tgtEl>
+                          </p:cBhvr>
+                        </p:animEffect>
+                      </p:childTnLst>
+                    </p:cTn>
+                  </p:par>
+                </p:childTnLst>
+              </p:cTn>
+              <p:prevCondLst>
+                <p:cond evt="onPrev" delay="0">
+                  <p:tgtEl>
+                    <p:sldTgt/>
+                  </p:tgtEl>
+                </p:cond>
+              </p:prevCondLst>
+              <p:nextCondLst>
+                <p:cond evt="onNext" delay="0">
+                  <p:tgtEl>
+                    <p:sldTgt/>
+                  </p:tgtEl>
+                </p:cond>
+              </p:nextCondLst>
+            </p:seq>
+          </p:childTnLst>
+        </p:cTn>
+      </p:par>
+    </p:tnLst>
+  </p:timing>
 </p:sld>
 </file>
 
@@ -45113,6 +49273,249 @@
   <p:clrMapOvr>
     <a:masterClrMapping/>
   </p:clrMapOvr>
+  <p:transition spd="med" advClick="1">
+    <p:push dir="l"/>
+  </p:transition>
+  <p:timing>
+    <p:tnLst>
+      <p:par>
+        <p:cTn id="1" dur="indefinite" restart="never" nodeType="tmRoot">
+          <p:childTnLst>
+            <p:seq concurrent="1" nextAc="seek">
+              <p:cTn id="2" dur="indefinite" nodeType="mainSeq">
+                <p:childTnLst>
+                  <p:par>
+                    <p:cTn id="3" presetID="10" presetClass="entr" presetSubtype="0" fill="hold" nodeType="afterPrev">
+                      <p:stCondLst>
+                        <p:cond delay="0"/>
+                      </p:stCondLst>
+                      <p:childTnLst>
+                        <p:set>
+                          <p:cBhvr>
+                            <p:cTn id="4" dur="1" fill="hold">
+                              <p:stCondLst>
+                                <p:cond delay="0"/>
+                              </p:stCondLst>
+                            </p:cTn>
+                            <p:tgtEl>
+                              <p:spTgt spid="195"/>
+                            </p:tgtEl>
+                            <p:attrNameLst>
+                              <p:attrName>style.visibility</p:attrName>
+                            </p:attrNameLst>
+                          </p:cBhvr>
+                          <p:to>
+                            <p:strVal val="visible"/>
+                          </p:to>
+                        </p:set>
+                        <p:animEffect transition="in" filter="fade">
+                          <p:cBhvr>
+                            <p:cTn id="100" dur="500"/>
+                            <p:tgtEl>
+                              <p:spTgt spid="195"/>
+                            </p:tgtEl>
+                          </p:cBhvr>
+                        </p:animEffect>
+                      </p:childTnLst>
+                    </p:cTn>
+                  </p:par>
+                  <p:par>
+                    <p:cTn id="5" presetID="10" presetClass="entr" presetSubtype="0" fill="hold" nodeType="afterPrev">
+                      <p:stCondLst>
+                        <p:cond delay="300"/>
+                      </p:stCondLst>
+                      <p:childTnLst>
+                        <p:set>
+                          <p:cBhvr>
+                            <p:cTn id="6" dur="1" fill="hold">
+                              <p:stCondLst>
+                                <p:cond delay="0"/>
+                              </p:stCondLst>
+                            </p:cTn>
+                            <p:tgtEl>
+                              <p:spTgt spid="224"/>
+                            </p:tgtEl>
+                            <p:attrNameLst>
+                              <p:attrName>style.visibility</p:attrName>
+                            </p:attrNameLst>
+                          </p:cBhvr>
+                          <p:to>
+                            <p:strVal val="visible"/>
+                          </p:to>
+                        </p:set>
+                        <p:animEffect transition="in" filter="fade">
+                          <p:cBhvr>
+                            <p:cTn id="101" dur="500"/>
+                            <p:tgtEl>
+                              <p:spTgt spid="224"/>
+                            </p:tgtEl>
+                          </p:cBhvr>
+                        </p:animEffect>
+                      </p:childTnLst>
+                    </p:cTn>
+                  </p:par>
+                  <p:par>
+                    <p:cTn id="7" presetID="10" presetClass="entr" presetSubtype="0" fill="hold" nodeType="afterPrev">
+                      <p:stCondLst>
+                        <p:cond delay="600"/>
+                      </p:stCondLst>
+                      <p:childTnLst>
+                        <p:set>
+                          <p:cBhvr>
+                            <p:cTn id="8" dur="1" fill="hold">
+                              <p:stCondLst>
+                                <p:cond delay="0"/>
+                              </p:stCondLst>
+                            </p:cTn>
+                            <p:tgtEl>
+                              <p:spTgt spid="225"/>
+                            </p:tgtEl>
+                            <p:attrNameLst>
+                              <p:attrName>style.visibility</p:attrName>
+                            </p:attrNameLst>
+                          </p:cBhvr>
+                          <p:to>
+                            <p:strVal val="visible"/>
+                          </p:to>
+                        </p:set>
+                        <p:animEffect transition="in" filter="fade">
+                          <p:cBhvr>
+                            <p:cTn id="102" dur="500"/>
+                            <p:tgtEl>
+                              <p:spTgt spid="225"/>
+                            </p:tgtEl>
+                          </p:cBhvr>
+                        </p:animEffect>
+                      </p:childTnLst>
+                    </p:cTn>
+                  </p:par>
+                  <p:par>
+                    <p:cTn id="9" presetID="10" presetClass="entr" presetSubtype="0" fill="hold" nodeType="afterPrev">
+                      <p:stCondLst>
+                        <p:cond delay="900"/>
+                      </p:stCondLst>
+                      <p:childTnLst>
+                        <p:set>
+                          <p:cBhvr>
+                            <p:cTn id="10" dur="1" fill="hold">
+                              <p:stCondLst>
+                                <p:cond delay="0"/>
+                              </p:stCondLst>
+                            </p:cTn>
+                            <p:tgtEl>
+                              <p:spTgt spid="61"/>
+                            </p:tgtEl>
+                            <p:attrNameLst>
+                              <p:attrName>style.visibility</p:attrName>
+                            </p:attrNameLst>
+                          </p:cBhvr>
+                          <p:to>
+                            <p:strVal val="visible"/>
+                          </p:to>
+                        </p:set>
+                        <p:animEffect transition="in" filter="fade">
+                          <p:cBhvr>
+                            <p:cTn id="103" dur="500"/>
+                            <p:tgtEl>
+                              <p:spTgt spid="61"/>
+                            </p:tgtEl>
+                          </p:cBhvr>
+                        </p:animEffect>
+                      </p:childTnLst>
+                    </p:cTn>
+                  </p:par>
+                  <p:par>
+                    <p:cTn id="11" presetID="10" presetClass="entr" presetSubtype="0" fill="hold" nodeType="afterPrev">
+                      <p:stCondLst>
+                        <p:cond delay="1200"/>
+                      </p:stCondLst>
+                      <p:childTnLst>
+                        <p:set>
+                          <p:cBhvr>
+                            <p:cTn id="12" dur="1" fill="hold">
+                              <p:stCondLst>
+                                <p:cond delay="0"/>
+                              </p:stCondLst>
+                            </p:cTn>
+                            <p:tgtEl>
+                              <p:spTgt spid="62"/>
+                            </p:tgtEl>
+                            <p:attrNameLst>
+                              <p:attrName>style.visibility</p:attrName>
+                            </p:attrNameLst>
+                          </p:cBhvr>
+                          <p:to>
+                            <p:strVal val="visible"/>
+                          </p:to>
+                        </p:set>
+                        <p:animEffect transition="in" filter="fade">
+                          <p:cBhvr>
+                            <p:cTn id="104" dur="500"/>
+                            <p:tgtEl>
+                              <p:spTgt spid="62"/>
+                            </p:tgtEl>
+                          </p:cBhvr>
+                        </p:animEffect>
+                      </p:childTnLst>
+                    </p:cTn>
+                  </p:par>
+                  <p:par>
+                    <p:cTn id="13" presetID="10" presetClass="entr" presetSubtype="0" fill="hold" nodeType="afterPrev">
+                      <p:stCondLst>
+                        <p:cond delay="1500"/>
+                      </p:stCondLst>
+                      <p:childTnLst>
+                        <p:set>
+                          <p:cBhvr>
+                            <p:cTn id="14" dur="1" fill="hold">
+                              <p:stCondLst>
+                                <p:cond delay="0"/>
+                              </p:stCondLst>
+                            </p:cTn>
+                            <p:tgtEl>
+                              <p:spTgt spid="63"/>
+                            </p:tgtEl>
+                            <p:attrNameLst>
+                              <p:attrName>style.visibility</p:attrName>
+                            </p:attrNameLst>
+                          </p:cBhvr>
+                          <p:to>
+                            <p:strVal val="visible"/>
+                          </p:to>
+                        </p:set>
+                        <p:animEffect transition="in" filter="fade">
+                          <p:cBhvr>
+                            <p:cTn id="105" dur="500"/>
+                            <p:tgtEl>
+                              <p:spTgt spid="63"/>
+                            </p:tgtEl>
+                          </p:cBhvr>
+                        </p:animEffect>
+                      </p:childTnLst>
+                    </p:cTn>
+                  </p:par>
+                </p:childTnLst>
+              </p:cTn>
+              <p:prevCondLst>
+                <p:cond evt="onPrev" delay="0">
+                  <p:tgtEl>
+                    <p:sldTgt/>
+                  </p:tgtEl>
+                </p:cond>
+              </p:prevCondLst>
+              <p:nextCondLst>
+                <p:cond evt="onNext" delay="0">
+                  <p:tgtEl>
+                    <p:sldTgt/>
+                  </p:tgtEl>
+                </p:cond>
+              </p:nextCondLst>
+            </p:seq>
+          </p:childTnLst>
+        </p:cTn>
+      </p:par>
+    </p:tnLst>
+  </p:timing>
 </p:sld>
 </file>
 
@@ -47589,6 +51992,249 @@
   <p:clrMapOvr>
     <a:masterClrMapping/>
   </p:clrMapOvr>
+  <p:transition spd="med" advClick="1">
+    <p:fade/>
+  </p:transition>
+  <p:timing>
+    <p:tnLst>
+      <p:par>
+        <p:cTn id="1" dur="indefinite" restart="never" nodeType="tmRoot">
+          <p:childTnLst>
+            <p:seq concurrent="1" nextAc="seek">
+              <p:cTn id="2" dur="indefinite" nodeType="mainSeq">
+                <p:childTnLst>
+                  <p:par>
+                    <p:cTn id="3" presetID="10" presetClass="entr" presetSubtype="0" fill="hold" nodeType="afterPrev">
+                      <p:stCondLst>
+                        <p:cond delay="0"/>
+                      </p:stCondLst>
+                      <p:childTnLst>
+                        <p:set>
+                          <p:cBhvr>
+                            <p:cTn id="4" dur="1" fill="hold">
+                              <p:stCondLst>
+                                <p:cond delay="0"/>
+                              </p:stCondLst>
+                            </p:cTn>
+                            <p:tgtEl>
+                              <p:spTgt spid="230"/>
+                            </p:tgtEl>
+                            <p:attrNameLst>
+                              <p:attrName>style.visibility</p:attrName>
+                            </p:attrNameLst>
+                          </p:cBhvr>
+                          <p:to>
+                            <p:strVal val="visible"/>
+                          </p:to>
+                        </p:set>
+                        <p:animEffect transition="in" filter="fade">
+                          <p:cBhvr>
+                            <p:cTn id="100" dur="500"/>
+                            <p:tgtEl>
+                              <p:spTgt spid="230"/>
+                            </p:tgtEl>
+                          </p:cBhvr>
+                        </p:animEffect>
+                      </p:childTnLst>
+                    </p:cTn>
+                  </p:par>
+                  <p:par>
+                    <p:cTn id="5" presetID="10" presetClass="entr" presetSubtype="0" fill="hold" nodeType="afterPrev">
+                      <p:stCondLst>
+                        <p:cond delay="300"/>
+                      </p:stCondLst>
+                      <p:childTnLst>
+                        <p:set>
+                          <p:cBhvr>
+                            <p:cTn id="6" dur="1" fill="hold">
+                              <p:stCondLst>
+                                <p:cond delay="0"/>
+                              </p:stCondLst>
+                            </p:cTn>
+                            <p:tgtEl>
+                              <p:spTgt spid="231"/>
+                            </p:tgtEl>
+                            <p:attrNameLst>
+                              <p:attrName>style.visibility</p:attrName>
+                            </p:attrNameLst>
+                          </p:cBhvr>
+                          <p:to>
+                            <p:strVal val="visible"/>
+                          </p:to>
+                        </p:set>
+                        <p:animEffect transition="in" filter="fade">
+                          <p:cBhvr>
+                            <p:cTn id="101" dur="500"/>
+                            <p:tgtEl>
+                              <p:spTgt spid="231"/>
+                            </p:tgtEl>
+                          </p:cBhvr>
+                        </p:animEffect>
+                      </p:childTnLst>
+                    </p:cTn>
+                  </p:par>
+                  <p:par>
+                    <p:cTn id="7" presetID="10" presetClass="entr" presetSubtype="0" fill="hold" nodeType="afterPrev">
+                      <p:stCondLst>
+                        <p:cond delay="600"/>
+                      </p:stCondLst>
+                      <p:childTnLst>
+                        <p:set>
+                          <p:cBhvr>
+                            <p:cTn id="8" dur="1" fill="hold">
+                              <p:stCondLst>
+                                <p:cond delay="0"/>
+                              </p:stCondLst>
+                            </p:cTn>
+                            <p:tgtEl>
+                              <p:spTgt spid="232"/>
+                            </p:tgtEl>
+                            <p:attrNameLst>
+                              <p:attrName>style.visibility</p:attrName>
+                            </p:attrNameLst>
+                          </p:cBhvr>
+                          <p:to>
+                            <p:strVal val="visible"/>
+                          </p:to>
+                        </p:set>
+                        <p:animEffect transition="in" filter="fade">
+                          <p:cBhvr>
+                            <p:cTn id="102" dur="500"/>
+                            <p:tgtEl>
+                              <p:spTgt spid="232"/>
+                            </p:tgtEl>
+                          </p:cBhvr>
+                        </p:animEffect>
+                      </p:childTnLst>
+                    </p:cTn>
+                  </p:par>
+                  <p:par>
+                    <p:cTn id="9" presetID="10" presetClass="entr" presetSubtype="0" fill="hold" nodeType="afterPrev">
+                      <p:stCondLst>
+                        <p:cond delay="900"/>
+                      </p:stCondLst>
+                      <p:childTnLst>
+                        <p:set>
+                          <p:cBhvr>
+                            <p:cTn id="10" dur="1" fill="hold">
+                              <p:stCondLst>
+                                <p:cond delay="0"/>
+                              </p:stCondLst>
+                            </p:cTn>
+                            <p:tgtEl>
+                              <p:spTgt spid="233"/>
+                            </p:tgtEl>
+                            <p:attrNameLst>
+                              <p:attrName>style.visibility</p:attrName>
+                            </p:attrNameLst>
+                          </p:cBhvr>
+                          <p:to>
+                            <p:strVal val="visible"/>
+                          </p:to>
+                        </p:set>
+                        <p:animEffect transition="in" filter="fade">
+                          <p:cBhvr>
+                            <p:cTn id="103" dur="500"/>
+                            <p:tgtEl>
+                              <p:spTgt spid="233"/>
+                            </p:tgtEl>
+                          </p:cBhvr>
+                        </p:animEffect>
+                      </p:childTnLst>
+                    </p:cTn>
+                  </p:par>
+                  <p:par>
+                    <p:cTn id="11" presetID="10" presetClass="entr" presetSubtype="0" fill="hold" nodeType="afterPrev">
+                      <p:stCondLst>
+                        <p:cond delay="1200"/>
+                      </p:stCondLst>
+                      <p:childTnLst>
+                        <p:set>
+                          <p:cBhvr>
+                            <p:cTn id="12" dur="1" fill="hold">
+                              <p:stCondLst>
+                                <p:cond delay="0"/>
+                              </p:stCondLst>
+                            </p:cTn>
+                            <p:tgtEl>
+                              <p:spTgt spid="32"/>
+                            </p:tgtEl>
+                            <p:attrNameLst>
+                              <p:attrName>style.visibility</p:attrName>
+                            </p:attrNameLst>
+                          </p:cBhvr>
+                          <p:to>
+                            <p:strVal val="visible"/>
+                          </p:to>
+                        </p:set>
+                        <p:animEffect transition="in" filter="fade">
+                          <p:cBhvr>
+                            <p:cTn id="104" dur="500"/>
+                            <p:tgtEl>
+                              <p:spTgt spid="32"/>
+                            </p:tgtEl>
+                          </p:cBhvr>
+                        </p:animEffect>
+                      </p:childTnLst>
+                    </p:cTn>
+                  </p:par>
+                  <p:par>
+                    <p:cTn id="13" presetID="10" presetClass="entr" presetSubtype="0" fill="hold" nodeType="afterPrev">
+                      <p:stCondLst>
+                        <p:cond delay="1500"/>
+                      </p:stCondLst>
+                      <p:childTnLst>
+                        <p:set>
+                          <p:cBhvr>
+                            <p:cTn id="14" dur="1" fill="hold">
+                              <p:stCondLst>
+                                <p:cond delay="0"/>
+                              </p:stCondLst>
+                            </p:cTn>
+                            <p:tgtEl>
+                              <p:spTgt spid="33"/>
+                            </p:tgtEl>
+                            <p:attrNameLst>
+                              <p:attrName>style.visibility</p:attrName>
+                            </p:attrNameLst>
+                          </p:cBhvr>
+                          <p:to>
+                            <p:strVal val="visible"/>
+                          </p:to>
+                        </p:set>
+                        <p:animEffect transition="in" filter="fade">
+                          <p:cBhvr>
+                            <p:cTn id="105" dur="500"/>
+                            <p:tgtEl>
+                              <p:spTgt spid="33"/>
+                            </p:tgtEl>
+                          </p:cBhvr>
+                        </p:animEffect>
+                      </p:childTnLst>
+                    </p:cTn>
+                  </p:par>
+                </p:childTnLst>
+              </p:cTn>
+              <p:prevCondLst>
+                <p:cond evt="onPrev" delay="0">
+                  <p:tgtEl>
+                    <p:sldTgt/>
+                  </p:tgtEl>
+                </p:cond>
+              </p:prevCondLst>
+              <p:nextCondLst>
+                <p:cond evt="onNext" delay="0">
+                  <p:tgtEl>
+                    <p:sldTgt/>
+                  </p:tgtEl>
+                </p:cond>
+              </p:nextCondLst>
+            </p:seq>
+          </p:childTnLst>
+        </p:cTn>
+      </p:par>
+    </p:tnLst>
+  </p:timing>
 </p:sld>
 </file>
 
@@ -47884,6 +52530,214 @@
   <p:clrMapOvr>
     <a:masterClrMapping/>
   </p:clrMapOvr>
+  <p:transition spd="med" advClick="1">
+    <p:fade/>
+  </p:transition>
+  <p:timing>
+    <p:tnLst>
+      <p:par>
+        <p:cTn id="1" dur="indefinite" restart="never" nodeType="tmRoot">
+          <p:childTnLst>
+            <p:seq concurrent="1" nextAc="seek">
+              <p:cTn id="2" dur="indefinite" nodeType="mainSeq">
+                <p:childTnLst>
+                  <p:par>
+                    <p:cTn id="3" presetID="10" presetClass="entr" presetSubtype="0" fill="hold" nodeType="afterPrev">
+                      <p:stCondLst>
+                        <p:cond delay="0"/>
+                      </p:stCondLst>
+                      <p:childTnLst>
+                        <p:set>
+                          <p:cBhvr>
+                            <p:cTn id="4" dur="1" fill="hold">
+                              <p:stCondLst>
+                                <p:cond delay="0"/>
+                              </p:stCondLst>
+                            </p:cTn>
+                            <p:tgtEl>
+                              <p:spTgt spid="264"/>
+                            </p:tgtEl>
+                            <p:attrNameLst>
+                              <p:attrName>style.visibility</p:attrName>
+                            </p:attrNameLst>
+                          </p:cBhvr>
+                          <p:to>
+                            <p:strVal val="visible"/>
+                          </p:to>
+                        </p:set>
+                        <p:animEffect transition="in" filter="fade">
+                          <p:cBhvr>
+                            <p:cTn id="100" dur="500"/>
+                            <p:tgtEl>
+                              <p:spTgt spid="264"/>
+                            </p:tgtEl>
+                          </p:cBhvr>
+                        </p:animEffect>
+                      </p:childTnLst>
+                    </p:cTn>
+                  </p:par>
+                  <p:par>
+                    <p:cTn id="5" presetID="10" presetClass="entr" presetSubtype="0" fill="hold" nodeType="afterPrev">
+                      <p:stCondLst>
+                        <p:cond delay="300"/>
+                      </p:stCondLst>
+                      <p:childTnLst>
+                        <p:set>
+                          <p:cBhvr>
+                            <p:cTn id="6" dur="1" fill="hold">
+                              <p:stCondLst>
+                                <p:cond delay="0"/>
+                              </p:stCondLst>
+                            </p:cTn>
+                            <p:tgtEl>
+                              <p:spTgt spid="265"/>
+                            </p:tgtEl>
+                            <p:attrNameLst>
+                              <p:attrName>style.visibility</p:attrName>
+                            </p:attrNameLst>
+                          </p:cBhvr>
+                          <p:to>
+                            <p:strVal val="visible"/>
+                          </p:to>
+                        </p:set>
+                        <p:animEffect transition="in" filter="fade">
+                          <p:cBhvr>
+                            <p:cTn id="101" dur="500"/>
+                            <p:tgtEl>
+                              <p:spTgt spid="265"/>
+                            </p:tgtEl>
+                          </p:cBhvr>
+                        </p:animEffect>
+                      </p:childTnLst>
+                    </p:cTn>
+                  </p:par>
+                  <p:par>
+                    <p:cTn id="7" presetID="10" presetClass="entr" presetSubtype="0" fill="hold" nodeType="afterPrev">
+                      <p:stCondLst>
+                        <p:cond delay="600"/>
+                      </p:stCondLst>
+                      <p:childTnLst>
+                        <p:set>
+                          <p:cBhvr>
+                            <p:cTn id="8" dur="1" fill="hold">
+                              <p:stCondLst>
+                                <p:cond delay="0"/>
+                              </p:stCondLst>
+                            </p:cTn>
+                            <p:tgtEl>
+                              <p:spTgt spid="266"/>
+                            </p:tgtEl>
+                            <p:attrNameLst>
+                              <p:attrName>style.visibility</p:attrName>
+                            </p:attrNameLst>
+                          </p:cBhvr>
+                          <p:to>
+                            <p:strVal val="visible"/>
+                          </p:to>
+                        </p:set>
+                        <p:animEffect transition="in" filter="fade">
+                          <p:cBhvr>
+                            <p:cTn id="102" dur="500"/>
+                            <p:tgtEl>
+                              <p:spTgt spid="266"/>
+                            </p:tgtEl>
+                          </p:cBhvr>
+                        </p:animEffect>
+                      </p:childTnLst>
+                    </p:cTn>
+                  </p:par>
+                  <p:par>
+                    <p:cTn id="9" presetID="10" presetClass="entr" presetSubtype="0" fill="hold" nodeType="afterPrev">
+                      <p:stCondLst>
+                        <p:cond delay="900"/>
+                      </p:stCondLst>
+                      <p:childTnLst>
+                        <p:set>
+                          <p:cBhvr>
+                            <p:cTn id="10" dur="1" fill="hold">
+                              <p:stCondLst>
+                                <p:cond delay="0"/>
+                              </p:stCondLst>
+                            </p:cTn>
+                            <p:tgtEl>
+                              <p:spTgt spid="267"/>
+                            </p:tgtEl>
+                            <p:attrNameLst>
+                              <p:attrName>style.visibility</p:attrName>
+                            </p:attrNameLst>
+                          </p:cBhvr>
+                          <p:to>
+                            <p:strVal val="visible"/>
+                          </p:to>
+                        </p:set>
+                        <p:animEffect transition="in" filter="fade">
+                          <p:cBhvr>
+                            <p:cTn id="103" dur="500"/>
+                            <p:tgtEl>
+                              <p:spTgt spid="267"/>
+                            </p:tgtEl>
+                          </p:cBhvr>
+                        </p:animEffect>
+                      </p:childTnLst>
+                    </p:cTn>
+                  </p:par>
+                  <p:par>
+                    <p:cTn id="11" presetID="10" presetClass="entr" presetSubtype="0" fill="hold" nodeType="afterPrev">
+                      <p:stCondLst>
+                        <p:cond delay="1200"/>
+                      </p:stCondLst>
+                      <p:childTnLst>
+                        <p:set>
+                          <p:cBhvr>
+                            <p:cTn id="12" dur="1" fill="hold">
+                              <p:stCondLst>
+                                <p:cond delay="0"/>
+                              </p:stCondLst>
+                            </p:cTn>
+                            <p:tgtEl>
+                              <p:spTgt spid="268"/>
+                            </p:tgtEl>
+                            <p:attrNameLst>
+                              <p:attrName>style.visibility</p:attrName>
+                            </p:attrNameLst>
+                          </p:cBhvr>
+                          <p:to>
+                            <p:strVal val="visible"/>
+                          </p:to>
+                        </p:set>
+                        <p:animEffect transition="in" filter="fade">
+                          <p:cBhvr>
+                            <p:cTn id="104" dur="500"/>
+                            <p:tgtEl>
+                              <p:spTgt spid="268"/>
+                            </p:tgtEl>
+                          </p:cBhvr>
+                        </p:animEffect>
+                      </p:childTnLst>
+                    </p:cTn>
+                  </p:par>
+                </p:childTnLst>
+              </p:cTn>
+              <p:prevCondLst>
+                <p:cond evt="onPrev" delay="0">
+                  <p:tgtEl>
+                    <p:sldTgt/>
+                  </p:tgtEl>
+                </p:cond>
+              </p:prevCondLst>
+              <p:nextCondLst>
+                <p:cond evt="onNext" delay="0">
+                  <p:tgtEl>
+                    <p:sldTgt/>
+                  </p:tgtEl>
+                </p:cond>
+              </p:nextCondLst>
+            </p:seq>
+          </p:childTnLst>
+        </p:cTn>
+      </p:par>
+    </p:tnLst>
+  </p:timing>
 </p:sld>
 </file>
 
